--- a/slides/06 Super Mario Bros.pptx
+++ b/slides/06 Super Mario Bros.pptx
@@ -10507,216 +10507,11 @@
           </a:p>
         </p:txBody>
       </p:sp>
-      <p:pic>
-        <p:nvPicPr>
-          <p:cNvPr id="185" name="Google Shape;185;p30"/>
-          <p:cNvPicPr preferRelativeResize="0"/>
-          <p:nvPr/>
-        </p:nvPicPr>
-        <p:blipFill>
-          <a:blip r:embed="rId3">
-            <a:alphaModFix/>
-          </a:blip>
-          <a:stretch>
-            <a:fillRect/>
-          </a:stretch>
-        </p:blipFill>
-        <p:spPr>
-          <a:xfrm>
-            <a:off x="3702216" y="3223775"/>
-            <a:ext cx="1739575" cy="1160725"/>
-          </a:xfrm>
-          <a:prstGeom prst="rect">
-            <a:avLst/>
-          </a:prstGeom>
-          <a:noFill/>
-          <a:ln>
-            <a:noFill/>
-          </a:ln>
-        </p:spPr>
-      </p:pic>
     </p:spTree>
   </p:cSld>
   <p:clrMapOvr>
     <a:masterClrMapping/>
   </p:clrMapOvr>
-  <p:timing>
-    <p:tnLst>
-      <p:par>
-        <p:cTn dur="indefinite" nodeType="tmRoot" restart="never">
-          <p:childTnLst>
-            <p:seq concurrent="1" nextAc="seek">
-              <p:cTn dur="indefinite" id="2" nodeType="mainSeq">
-                <p:childTnLst>
-                  <p:par>
-                    <p:cTn fill="hold">
-                      <p:stCondLst>
-                        <p:cond delay="indefinite"/>
-                      </p:stCondLst>
-                      <p:childTnLst>
-                        <p:par>
-                          <p:cTn fill="hold">
-                            <p:stCondLst>
-                              <p:cond delay="0"/>
-                            </p:stCondLst>
-                            <p:childTnLst>
-                              <p:par>
-                                <p:cTn fill="hold" nodeType="clickEffect" presetClass="entr" presetID="1" presetSubtype="0">
-                                  <p:stCondLst>
-                                    <p:cond delay="0"/>
-                                  </p:stCondLst>
-                                  <p:childTnLst>
-                                    <p:set>
-                                      <p:cBhvr>
-                                        <p:cTn dur="1" fill="hold">
-                                          <p:stCondLst>
-                                            <p:cond delay="0"/>
-                                          </p:stCondLst>
-                                        </p:cTn>
-                                        <p:tgtEl>
-                                          <p:spTgt spid="184">
-                                            <p:txEl>
-                                              <p:pRg end="0" st="0"/>
-                                            </p:txEl>
-                                          </p:spTgt>
-                                        </p:tgtEl>
-                                        <p:attrNameLst>
-                                          <p:attrName>style.visibility</p:attrName>
-                                        </p:attrNameLst>
-                                      </p:cBhvr>
-                                      <p:to>
-                                        <p:strVal val="visible"/>
-                                      </p:to>
-                                    </p:set>
-                                  </p:childTnLst>
-                                </p:cTn>
-                              </p:par>
-                            </p:childTnLst>
-                          </p:cTn>
-                        </p:par>
-                      </p:childTnLst>
-                    </p:cTn>
-                  </p:par>
-                  <p:par>
-                    <p:cTn fill="hold">
-                      <p:stCondLst>
-                        <p:cond delay="indefinite"/>
-                      </p:stCondLst>
-                      <p:childTnLst>
-                        <p:par>
-                          <p:cTn fill="hold">
-                            <p:stCondLst>
-                              <p:cond delay="0"/>
-                            </p:stCondLst>
-                            <p:childTnLst>
-                              <p:par>
-                                <p:cTn fill="hold" nodeType="clickEffect" presetClass="entr" presetID="1" presetSubtype="0">
-                                  <p:stCondLst>
-                                    <p:cond delay="0"/>
-                                  </p:stCondLst>
-                                  <p:childTnLst>
-                                    <p:set>
-                                      <p:cBhvr>
-                                        <p:cTn dur="1" fill="hold">
-                                          <p:stCondLst>
-                                            <p:cond delay="0"/>
-                                          </p:stCondLst>
-                                        </p:cTn>
-                                        <p:tgtEl>
-                                          <p:spTgt spid="184">
-                                            <p:txEl>
-                                              <p:pRg end="1" st="1"/>
-                                            </p:txEl>
-                                          </p:spTgt>
-                                        </p:tgtEl>
-                                        <p:attrNameLst>
-                                          <p:attrName>style.visibility</p:attrName>
-                                        </p:attrNameLst>
-                                      </p:cBhvr>
-                                      <p:to>
-                                        <p:strVal val="visible"/>
-                                      </p:to>
-                                    </p:set>
-                                  </p:childTnLst>
-                                </p:cTn>
-                              </p:par>
-                            </p:childTnLst>
-                          </p:cTn>
-                        </p:par>
-                      </p:childTnLst>
-                    </p:cTn>
-                  </p:par>
-                  <p:par>
-                    <p:cTn fill="hold">
-                      <p:stCondLst>
-                        <p:cond delay="indefinite"/>
-                      </p:stCondLst>
-                      <p:childTnLst>
-                        <p:par>
-                          <p:cTn fill="hold">
-                            <p:stCondLst>
-                              <p:cond delay="0"/>
-                            </p:stCondLst>
-                            <p:childTnLst>
-                              <p:par>
-                                <p:cTn fill="hold" nodeType="clickEffect" presetClass="entr" presetID="1" presetSubtype="0">
-                                  <p:stCondLst>
-                                    <p:cond delay="0"/>
-                                  </p:stCondLst>
-                                  <p:childTnLst>
-                                    <p:set>
-                                      <p:cBhvr>
-                                        <p:cTn dur="1" fill="hold">
-                                          <p:stCondLst>
-                                            <p:cond delay="0"/>
-                                          </p:stCondLst>
-                                        </p:cTn>
-                                        <p:tgtEl>
-                                          <p:spTgt spid="184">
-                                            <p:txEl>
-                                              <p:pRg end="2" st="2"/>
-                                            </p:txEl>
-                                          </p:spTgt>
-                                        </p:tgtEl>
-                                        <p:attrNameLst>
-                                          <p:attrName>style.visibility</p:attrName>
-                                        </p:attrNameLst>
-                                      </p:cBhvr>
-                                      <p:to>
-                                        <p:strVal val="visible"/>
-                                      </p:to>
-                                    </p:set>
-                                  </p:childTnLst>
-                                </p:cTn>
-                              </p:par>
-                            </p:childTnLst>
-                          </p:cTn>
-                        </p:par>
-                      </p:childTnLst>
-                    </p:cTn>
-                  </p:par>
-                </p:childTnLst>
-              </p:cTn>
-              <p:prevCondLst>
-                <p:cond evt="onPrev">
-                  <p:tgtEl>
-                    <p:sldTgt/>
-                  </p:tgtEl>
-                </p:cond>
-              </p:prevCondLst>
-              <p:nextCondLst>
-                <p:cond evt="onNext">
-                  <p:tgtEl>
-                    <p:sldTgt/>
-                  </p:tgtEl>
-                </p:cond>
-              </p:nextCondLst>
-            </p:seq>
-          </p:childTnLst>
-        </p:cTn>
-      </p:par>
-    </p:tnLst>
-  </p:timing>
 </p:sld>
 </file>
 

--- a/slides/06 Super Mario Bros.pptx
+++ b/slides/06 Super Mario Bros.pptx
@@ -28091,7 +28091,7 @@
             </a:pPr>
             <a:r>
               <a:rPr lang="en"/>
-              <a:t>A level maker that strings random chunks together, longer every level</a:t>
+              <a:t>A level maker that strings random chunks together into a level that can be finished</a:t>
             </a:r>
             <a:endParaRPr/>
           </a:p>

--- a/slides/06 Super Mario Bros.pptx
+++ b/slides/06 Super Mario Bros.pptx
@@ -28091,7 +28091,7 @@
             </a:pPr>
             <a:r>
               <a:rPr lang="en"/>
-              <a:t>A level maker that strings random chunks together into a level that can be finished</a:t>
+              <a:t>A level maker that strings random chunks together. Which chunks may follow which?</a:t>
             </a:r>
             <a:endParaRPr/>
           </a:p>
@@ -28663,6 +28663,23 @@
             <a:r>
               <a:rPr lang="en"/>
               <a:t>A mushroom: the player grows</a:t>
+            </a:r>
+            <a:endParaRPr/>
+          </a:p>
+          <a:p>
+            <a:pPr indent="-317500" lvl="1" marL="914400" rtl="0" algn="l">
+              <a:spcBef>
+                <a:spcPts val="0"/>
+              </a:spcBef>
+              <a:spcAft>
+                <a:spcPts val="0"/>
+              </a:spcAft>
+              <a:buSzPts val="1400"/>
+              <a:buChar char="○"/>
+            </a:pPr>
+            <a:r>
+              <a:rPr lang="en"/>
+              <a:t>Is “big” a state, like jumping? The player can be both at once</a:t>
             </a:r>
             <a:endParaRPr/>
           </a:p>

--- a/slides/06 Super Mario Bros.pptx
+++ b/slides/06 Super Mario Bros.pptx
@@ -49,6 +49,8 @@
     <p:sldId id="288" r:id="rId38"/>
     <p:sldId id="273" r:id="rId23"/>
     <p:sldId id="274" r:id="rId24"/>
+    <p:sldId id="309" r:id="rId22"/>
+    <p:sldId id="310" r:id="rId20"/>
     <p:sldId id="289" r:id="rId39"/>
     <p:sldId id="290" r:id="rId40"/>
     <p:sldId id="298" r:id="rId57"/>
@@ -1122,6 +1124,64 @@
 </p:notes>
 </file>
 
+<file path=ppt/notesSlides/notesSlide15.xml><?xml version="1.0" encoding="utf-8"?>
+<p:notes xmlns:a="http://schemas.openxmlformats.org/drawingml/2006/main" xmlns:p="http://schemas.openxmlformats.org/presentationml/2006/main" xmlns:r="http://schemas.openxmlformats.org/officeDocument/2006/relationships">
+  <p:cSld>
+    <p:spTree>
+      <p:nvGrpSpPr>
+        <p:cNvPr id="1" name=""/>
+        <p:cNvGrpSpPr/>
+        <p:nvPr/>
+      </p:nvGrpSpPr>
+      <p:grpSpPr>
+        <a:xfrm>
+          <a:off x="0" y="0"/>
+          <a:ext cx="0" cy="0"/>
+          <a:chOff x="0" y="0"/>
+          <a:chExt cx="0" cy="0"/>
+        </a:xfrm>
+      </p:grpSpPr>
+      <p:sp>
+        <p:nvSpPr>
+          <p:cNvPr id="2" name="Slide Image Placeholder 1"/>
+          <p:cNvSpPr>
+            <a:spLocks noGrp="1"/>
+          </p:cNvSpPr>
+          <p:nvPr>
+            <p:ph type="sldImg" idx="2"/>
+          </p:nvPr>
+        </p:nvSpPr>
+        <p:spPr/>
+      </p:sp>
+      <p:sp>
+        <p:nvSpPr>
+          <p:cNvPr id="3" name="Notes Placeholder 2"/>
+          <p:cNvSpPr>
+            <a:spLocks noGrp="1"/>
+          </p:cNvSpPr>
+          <p:nvPr>
+            <p:ph type="body" idx="1"/>
+          </p:nvPr>
+        </p:nvSpPr>
+        <p:spPr/>
+        <p:txBody>
+          <a:bodyPr/>
+          <a:lstStyle/>
+          <a:p>
+            <a:r>
+              <a:t>The session in one slide. Read each concern aloud and let the class give the answer before pointing at it.</a:t>
+            </a:r>
+          </a:p>
+        </p:txBody>
+      </p:sp>
+    </p:spTree>
+  </p:cSld>
+  <p:clrMapOvr>
+    <a:masterClrMapping/>
+  </p:clrMapOvr>
+</p:notes>
+</file>
+
 <file path=ppt/notesSlides/notesSlide16.xml><?xml version="1.0" encoding="utf-8"?>
 <p:notes xmlns:a="http://schemas.openxmlformats.org/drawingml/2006/main" xmlns:r="http://schemas.openxmlformats.org/officeDocument/2006/relationships" xmlns:mc="http://schemas.openxmlformats.org/markup-compatibility/2006" xmlns:mv="urn:schemas-microsoft-com:mac:vml" xmlns:p="http://schemas.openxmlformats.org/presentationml/2006/main" xmlns:c="http://schemas.openxmlformats.org/drawingml/2006/chart" xmlns:dgm="http://schemas.openxmlformats.org/drawingml/2006/diagram" xmlns:o="urn:schemas-microsoft-com:office:office" xmlns:v="urn:schemas-microsoft-com:vml" xmlns:pvml="urn:schemas-microsoft-com:office:powerpoint" xmlns:com="http://schemas.openxmlformats.org/drawingml/2006/compatibility" xmlns:p14="http://schemas.microsoft.com/office/powerpoint/2010/main" xmlns:p15="http://schemas.microsoft.com/office/powerpoint/2012/main" xmlns:ahyp="http://schemas.microsoft.com/office/drawing/2018/hyperlinkcolor" showMasterPhAnim="0" showMasterSp="0">
   <p:cSld>
@@ -1209,6 +1269,69 @@
           <a:p>
             <a:r>
               <a:t>- each state decides its own transitions</a:t>
+            </a:r>
+          </a:p>
+        </p:txBody>
+      </p:sp>
+    </p:spTree>
+  </p:cSld>
+  <p:clrMapOvr>
+    <a:masterClrMapping/>
+  </p:clrMapOvr>
+</p:notes>
+</file>
+
+<file path=ppt/notesSlides/notesSlide17.xml><?xml version="1.0" encoding="utf-8"?>
+<p:notes xmlns:a="http://schemas.openxmlformats.org/drawingml/2006/main" xmlns:p="http://schemas.openxmlformats.org/presentationml/2006/main" xmlns:r="http://schemas.openxmlformats.org/officeDocument/2006/relationships">
+  <p:cSld>
+    <p:spTree>
+      <p:nvGrpSpPr>
+        <p:cNvPr id="1" name=""/>
+        <p:cNvGrpSpPr/>
+        <p:nvPr/>
+      </p:nvGrpSpPr>
+      <p:grpSpPr>
+        <a:xfrm>
+          <a:off x="0" y="0"/>
+          <a:ext cx="0" cy="0"/>
+          <a:chOff x="0" y="0"/>
+          <a:chExt cx="0" cy="0"/>
+        </a:xfrm>
+      </p:grpSpPr>
+      <p:sp>
+        <p:nvSpPr>
+          <p:cNvPr id="2" name="Slide Image Placeholder 1"/>
+          <p:cNvSpPr>
+            <a:spLocks noGrp="1"/>
+          </p:cNvSpPr>
+          <p:nvPr>
+            <p:ph type="sldImg" idx="2"/>
+          </p:nvPr>
+        </p:nvSpPr>
+        <p:spPr/>
+      </p:sp>
+      <p:sp>
+        <p:nvSpPr>
+          <p:cNvPr id="3" name="Notes Placeholder 2"/>
+          <p:cNvSpPr>
+            <a:spLocks noGrp="1"/>
+          </p:cNvSpPr>
+          <p:nvPr>
+            <p:ph type="body" idx="1"/>
+          </p:nvPr>
+        </p:nvSpPr>
+        <p:spPr/>
+        <p:txBody>
+          <a:bodyPr/>
+          <a:lstStyle/>
+          <a:p>
+            <a:r>
+              <a:t>Who holds what in the finished platformer. PlayState asks a level maker for a GameLevel: two tilemaps, a camera and a list of entities.</a:t>
+            </a:r>
+          </a:p>
+          <a:p>
+            <a:r>
+              <a:t>The player and every slime hold their current state. Ask: which of the three state machines shares the most code, and where?</a:t>
             </a:r>
           </a:p>
         </p:txBody>
@@ -29373,6 +29496,1401 @@
 </p:sld>
 </file>
 
+<file path=ppt/slides/slide47.xml><?xml version="1.0" encoding="utf-8"?>
+<p:sld xmlns:a="http://schemas.openxmlformats.org/drawingml/2006/main" xmlns:p="http://schemas.openxmlformats.org/presentationml/2006/main" xmlns:r="http://schemas.openxmlformats.org/officeDocument/2006/relationships">
+  <p:cSld>
+    <p:spTree>
+      <p:nvGrpSpPr>
+        <p:cNvPr id="1" name=""/>
+        <p:cNvGrpSpPr/>
+        <p:nvPr/>
+      </p:nvGrpSpPr>
+      <p:grpSpPr/>
+      <p:sp>
+        <p:nvSpPr>
+          <p:cNvPr id="2" name="Title 1"/>
+          <p:cNvSpPr>
+            <a:spLocks noGrp="1"/>
+          </p:cNvSpPr>
+          <p:nvPr>
+            <p:ph type="title"/>
+          </p:nvPr>
+        </p:nvSpPr>
+        <p:spPr/>
+        <p:txBody>
+          <a:bodyPr/>
+          <a:lstStyle/>
+          <a:p>
+            <a:pPr indent="0" lvl="0" marL="0" rtl="0" algn="l">
+              <a:spcBef>
+                <a:spcPts val="0"/>
+              </a:spcBef>
+              <a:spcAft>
+                <a:spcPts val="0"/>
+              </a:spcAft>
+              <a:buNone/>
+            </a:pPr>
+            <a:r>
+              <a:rPr lang="en"/>
+              <a:t>The Whole Game</a:t>
+            </a:r>
+            <a:endParaRPr/>
+          </a:p>
+        </p:txBody>
+      </p:sp>
+      <p:sp>
+        <p:nvSpPr>
+          <p:cNvPr id="3" name="Text Placeholder 2"/>
+          <p:cNvSpPr>
+            <a:spLocks noGrp="1"/>
+          </p:cNvSpPr>
+          <p:nvPr>
+            <p:ph type="body" idx="1"/>
+          </p:nvPr>
+        </p:nvSpPr>
+        <p:spPr>
+          <a:xfrm>
+            <a:off x="311700" y="885950"/>
+            <a:ext cx="8520600" cy="521208"/>
+          </a:xfrm>
+        </p:spPr>
+        <p:txBody>
+          <a:bodyPr/>
+          <a:lstStyle/>
+          <a:p>
+            <a:pPr indent="-330200" lvl="0" marL="457200" rtl="0" algn="l">
+              <a:spcBef>
+                <a:spcPts val="0"/>
+              </a:spcBef>
+              <a:spcAft>
+                <a:spcPts val="0"/>
+              </a:spcAft>
+              <a:buSzPts val="1600"/>
+              <a:buChar char="●"/>
+            </a:pPr>
+            <a:r>
+              <a:rPr lang="en" b="1"/>
+              <a:t>Mario8 adds music and sounds. A level maker builds the level the play state holds.</a:t>
+            </a:r>
+            <a:endParaRPr/>
+          </a:p>
+        </p:txBody>
+      </p:sp>
+      <p:sp>
+        <p:nvSpPr>
+          <p:cNvPr id="4" name="Rounded Rectangle 3"/>
+          <p:cNvSpPr/>
+          <p:nvPr/>
+        </p:nvSpPr>
+        <p:spPr>
+          <a:xfrm>
+            <a:off x="3429000" y="1481328"/>
+            <a:ext cx="2286000" cy="566928"/>
+          </a:xfrm>
+          <a:prstGeom prst="roundRect">
+            <a:avLst>
+              <a:gd name="adj" fmla="val 12000"/>
+            </a:avLst>
+          </a:prstGeom>
+          <a:solidFill>
+            <a:srgbClr val="2E3338"/>
+          </a:solidFill>
+          <a:ln w="25400">
+            <a:solidFill>
+              <a:srgbClr val="D45D35"/>
+            </a:solidFill>
+          </a:ln>
+          <a:effectLst/>
+        </p:spPr>
+        <p:style>
+          <a:lnRef idx="1">
+            <a:schemeClr val="accent1"/>
+          </a:lnRef>
+          <a:fillRef idx="3">
+            <a:schemeClr val="accent1"/>
+          </a:fillRef>
+          <a:effectRef idx="2">
+            <a:schemeClr val="accent1"/>
+          </a:effectRef>
+          <a:fontRef idx="minor">
+            <a:schemeClr val="lt1"/>
+          </a:fontRef>
+        </p:style>
+        <p:txBody>
+          <a:bodyPr rtlCol="0" anchor="ctr" wrap="square" lIns="73152" rIns="73152"/>
+          <a:lstStyle/>
+          <a:p>
+            <a:pPr algn="ctr"/>
+            <a:r>
+              <a:rPr sz="1300" b="1">
+                <a:solidFill>
+                  <a:srgbClr val="DEE2E6"/>
+                </a:solidFill>
+              </a:rPr>
+              <a:t>Game1 : Core</a:t>
+            </a:r>
+          </a:p>
+          <a:p>
+            <a:pPr algn="ctr"/>
+            <a:r>
+              <a:rPr sz="1100" b="0">
+                <a:solidFill>
+                  <a:srgbClr val="9AA3AB"/>
+                </a:solidFill>
+              </a:rPr>
+              <a:t>the current game state</a:t>
+            </a:r>
+          </a:p>
+        </p:txBody>
+      </p:sp>
+      <p:sp>
+        <p:nvSpPr>
+          <p:cNvPr id="5" name="Rounded Rectangle 4"/>
+          <p:cNvSpPr/>
+          <p:nvPr/>
+        </p:nvSpPr>
+        <p:spPr>
+          <a:xfrm>
+            <a:off x="374903" y="2246376"/>
+            <a:ext cx="1591056" cy="566928"/>
+          </a:xfrm>
+          <a:prstGeom prst="roundRect">
+            <a:avLst>
+              <a:gd name="adj" fmla="val 12000"/>
+            </a:avLst>
+          </a:prstGeom>
+          <a:solidFill>
+            <a:srgbClr val="2E3338"/>
+          </a:solidFill>
+          <a:ln>
+            <a:noFill/>
+          </a:ln>
+          <a:effectLst/>
+        </p:spPr>
+        <p:style>
+          <a:lnRef idx="1">
+            <a:schemeClr val="accent1"/>
+          </a:lnRef>
+          <a:fillRef idx="3">
+            <a:schemeClr val="accent1"/>
+          </a:fillRef>
+          <a:effectRef idx="2">
+            <a:schemeClr val="accent1"/>
+          </a:effectRef>
+          <a:fontRef idx="minor">
+            <a:schemeClr val="lt1"/>
+          </a:fontRef>
+        </p:style>
+        <p:txBody>
+          <a:bodyPr rtlCol="0" anchor="ctr" wrap="square" lIns="73152" rIns="73152"/>
+          <a:lstStyle/>
+          <a:p>
+            <a:pPr algn="ctr"/>
+            <a:r>
+              <a:rPr sz="1300" b="1">
+                <a:solidFill>
+                  <a:srgbClr val="DEE2E6"/>
+                </a:solidFill>
+              </a:rPr>
+              <a:t>StartState</a:t>
+            </a:r>
+          </a:p>
+        </p:txBody>
+      </p:sp>
+      <p:cxnSp>
+        <p:nvCxnSpPr>
+          <p:cNvPr id="6" name="Connector 5"/>
+          <p:cNvCxnSpPr/>
+          <p:nvPr/>
+        </p:nvCxnSpPr>
+        <p:spPr>
+          <a:xfrm flipH="1">
+            <a:off x="1170432" y="2066544"/>
+            <a:ext cx="3401568" cy="161544"/>
+          </a:xfrm>
+          <a:prstGeom prst="line">
+            <a:avLst/>
+          </a:prstGeom>
+          <a:ln w="25400">
+            <a:solidFill>
+              <a:srgbClr val="9AA3AB"/>
+            </a:solidFill>
+            <a:tailEnd type="triangle"/>
+          </a:ln>
+        </p:spPr>
+        <p:style>
+          <a:lnRef idx="2">
+            <a:schemeClr val="accent1"/>
+          </a:lnRef>
+          <a:fillRef idx="0">
+            <a:schemeClr val="accent1"/>
+          </a:fillRef>
+          <a:effectRef idx="1">
+            <a:schemeClr val="accent1"/>
+          </a:effectRef>
+          <a:fontRef idx="minor">
+            <a:schemeClr val="tx1"/>
+          </a:fontRef>
+        </p:style>
+      </p:cxnSp>
+      <p:sp>
+        <p:nvSpPr>
+          <p:cNvPr id="7" name="Rounded Rectangle 6"/>
+          <p:cNvSpPr/>
+          <p:nvPr/>
+        </p:nvSpPr>
+        <p:spPr>
+          <a:xfrm>
+            <a:off x="4279392" y="2246376"/>
+            <a:ext cx="2286000" cy="566928"/>
+          </a:xfrm>
+          <a:prstGeom prst="roundRect">
+            <a:avLst>
+              <a:gd name="adj" fmla="val 12000"/>
+            </a:avLst>
+          </a:prstGeom>
+          <a:solidFill>
+            <a:srgbClr val="2E3338"/>
+          </a:solidFill>
+          <a:ln>
+            <a:noFill/>
+          </a:ln>
+          <a:effectLst/>
+        </p:spPr>
+        <p:style>
+          <a:lnRef idx="1">
+            <a:schemeClr val="accent1"/>
+          </a:lnRef>
+          <a:fillRef idx="3">
+            <a:schemeClr val="accent1"/>
+          </a:fillRef>
+          <a:effectRef idx="2">
+            <a:schemeClr val="accent1"/>
+          </a:effectRef>
+          <a:fontRef idx="minor">
+            <a:schemeClr val="lt1"/>
+          </a:fontRef>
+        </p:style>
+        <p:txBody>
+          <a:bodyPr rtlCol="0" anchor="ctr" wrap="square" lIns="73152" rIns="73152"/>
+          <a:lstStyle/>
+          <a:p>
+            <a:pPr algn="ctr"/>
+            <a:r>
+              <a:rPr sz="1300" b="1">
+                <a:solidFill>
+                  <a:srgbClr val="DEE2E6"/>
+                </a:solidFill>
+              </a:rPr>
+              <a:t>PlayState</a:t>
+            </a:r>
+          </a:p>
+        </p:txBody>
+      </p:sp>
+      <p:sp>
+        <p:nvSpPr>
+          <p:cNvPr id="8" name="Rounded Rectangle 7"/>
+          <p:cNvSpPr/>
+          <p:nvPr/>
+        </p:nvSpPr>
+        <p:spPr>
+          <a:xfrm>
+            <a:off x="2075688" y="3011424"/>
+            <a:ext cx="1591056" cy="566928"/>
+          </a:xfrm>
+          <a:prstGeom prst="roundRect">
+            <a:avLst>
+              <a:gd name="adj" fmla="val 12000"/>
+            </a:avLst>
+          </a:prstGeom>
+          <a:solidFill>
+            <a:srgbClr val="2E3338"/>
+          </a:solidFill>
+          <a:ln>
+            <a:noFill/>
+          </a:ln>
+          <a:effectLst/>
+        </p:spPr>
+        <p:style>
+          <a:lnRef idx="1">
+            <a:schemeClr val="accent1"/>
+          </a:lnRef>
+          <a:fillRef idx="3">
+            <a:schemeClr val="accent1"/>
+          </a:fillRef>
+          <a:effectRef idx="2">
+            <a:schemeClr val="accent1"/>
+          </a:effectRef>
+          <a:fontRef idx="minor">
+            <a:schemeClr val="lt1"/>
+          </a:fontRef>
+        </p:style>
+        <p:txBody>
+          <a:bodyPr rtlCol="0" anchor="ctr" wrap="square" lIns="73152" rIns="73152"/>
+          <a:lstStyle/>
+          <a:p>
+            <a:pPr algn="ctr"/>
+            <a:r>
+              <a:rPr sz="1300" b="1">
+                <a:solidFill>
+                  <a:srgbClr val="DEE2E6"/>
+                </a:solidFill>
+              </a:rPr>
+              <a:t>Level maker</a:t>
+            </a:r>
+          </a:p>
+          <a:p>
+            <a:pPr algn="ctr"/>
+            <a:r>
+              <a:rPr sz="1100" b="0">
+                <a:solidFill>
+                  <a:srgbClr val="9AA3AB"/>
+                </a:solidFill>
+              </a:rPr>
+              <a:t>builds the level</a:t>
+            </a:r>
+          </a:p>
+        </p:txBody>
+      </p:sp>
+      <p:cxnSp>
+        <p:nvCxnSpPr>
+          <p:cNvPr id="9" name="Connector 8"/>
+          <p:cNvCxnSpPr/>
+          <p:nvPr/>
+        </p:nvCxnSpPr>
+        <p:spPr>
+          <a:xfrm flipH="1">
+            <a:off x="2871216" y="2831592"/>
+            <a:ext cx="2551176" cy="161544"/>
+          </a:xfrm>
+          <a:prstGeom prst="line">
+            <a:avLst/>
+          </a:prstGeom>
+          <a:ln w="25400">
+            <a:solidFill>
+              <a:srgbClr val="9AA3AB"/>
+            </a:solidFill>
+            <a:tailEnd type="triangle"/>
+          </a:ln>
+        </p:spPr>
+        <p:style>
+          <a:lnRef idx="2">
+            <a:schemeClr val="accent1"/>
+          </a:lnRef>
+          <a:fillRef idx="0">
+            <a:schemeClr val="accent1"/>
+          </a:fillRef>
+          <a:effectRef idx="1">
+            <a:schemeClr val="accent1"/>
+          </a:effectRef>
+          <a:fontRef idx="minor">
+            <a:schemeClr val="tx1"/>
+          </a:fontRef>
+        </p:style>
+      </p:cxnSp>
+      <p:sp>
+        <p:nvSpPr>
+          <p:cNvPr id="10" name="Rounded Rectangle 9"/>
+          <p:cNvSpPr/>
+          <p:nvPr/>
+        </p:nvSpPr>
+        <p:spPr>
+          <a:xfrm>
+            <a:off x="5129784" y="3011424"/>
+            <a:ext cx="2286000" cy="566928"/>
+          </a:xfrm>
+          <a:prstGeom prst="roundRect">
+            <a:avLst>
+              <a:gd name="adj" fmla="val 12000"/>
+            </a:avLst>
+          </a:prstGeom>
+          <a:solidFill>
+            <a:srgbClr val="2E3338"/>
+          </a:solidFill>
+          <a:ln>
+            <a:noFill/>
+          </a:ln>
+          <a:effectLst/>
+        </p:spPr>
+        <p:style>
+          <a:lnRef idx="1">
+            <a:schemeClr val="accent1"/>
+          </a:lnRef>
+          <a:fillRef idx="3">
+            <a:schemeClr val="accent1"/>
+          </a:fillRef>
+          <a:effectRef idx="2">
+            <a:schemeClr val="accent1"/>
+          </a:effectRef>
+          <a:fontRef idx="minor">
+            <a:schemeClr val="lt1"/>
+          </a:fontRef>
+        </p:style>
+        <p:txBody>
+          <a:bodyPr rtlCol="0" anchor="ctr" wrap="square" lIns="73152" rIns="73152"/>
+          <a:lstStyle/>
+          <a:p>
+            <a:pPr algn="ctr"/>
+            <a:r>
+              <a:rPr sz="1300" b="1">
+                <a:solidFill>
+                  <a:srgbClr val="DEE2E6"/>
+                </a:solidFill>
+              </a:rPr>
+              <a:t>GameLevel</a:t>
+            </a:r>
+          </a:p>
+        </p:txBody>
+      </p:sp>
+      <p:sp>
+        <p:nvSpPr>
+          <p:cNvPr id="11" name="Rounded Rectangle 10"/>
+          <p:cNvSpPr/>
+          <p:nvPr/>
+        </p:nvSpPr>
+        <p:spPr>
+          <a:xfrm>
+            <a:off x="3776472" y="3776472"/>
+            <a:ext cx="1591056" cy="566928"/>
+          </a:xfrm>
+          <a:prstGeom prst="roundRect">
+            <a:avLst>
+              <a:gd name="adj" fmla="val 12000"/>
+            </a:avLst>
+          </a:prstGeom>
+          <a:solidFill>
+            <a:srgbClr val="2E3338"/>
+          </a:solidFill>
+          <a:ln>
+            <a:noFill/>
+          </a:ln>
+          <a:effectLst/>
+        </p:spPr>
+        <p:style>
+          <a:lnRef idx="1">
+            <a:schemeClr val="accent1"/>
+          </a:lnRef>
+          <a:fillRef idx="3">
+            <a:schemeClr val="accent1"/>
+          </a:fillRef>
+          <a:effectRef idx="2">
+            <a:schemeClr val="accent1"/>
+          </a:effectRef>
+          <a:fontRef idx="minor">
+            <a:schemeClr val="lt1"/>
+          </a:fontRef>
+        </p:style>
+        <p:txBody>
+          <a:bodyPr rtlCol="0" anchor="ctr" wrap="square" lIns="73152" rIns="73152"/>
+          <a:lstStyle/>
+          <a:p>
+            <a:pPr algn="ctr"/>
+            <a:r>
+              <a:rPr sz="1300" b="1">
+                <a:solidFill>
+                  <a:srgbClr val="DEE2E6"/>
+                </a:solidFill>
+              </a:rPr>
+              <a:t>Tilemap</a:t>
+            </a:r>
+          </a:p>
+          <a:p>
+            <a:pPr algn="ctr"/>
+            <a:r>
+              <a:rPr sz="1100" b="0">
+                <a:solidFill>
+                  <a:srgbClr val="9AA3AB"/>
+                </a:solidFill>
+              </a:rPr>
+              <a:t>ground and toppers</a:t>
+            </a:r>
+          </a:p>
+        </p:txBody>
+      </p:sp>
+      <p:cxnSp>
+        <p:nvCxnSpPr>
+          <p:cNvPr id="12" name="Connector 11"/>
+          <p:cNvCxnSpPr/>
+          <p:nvPr/>
+        </p:nvCxnSpPr>
+        <p:spPr>
+          <a:xfrm flipH="1">
+            <a:off x="4572000" y="3596640"/>
+            <a:ext cx="1700784" cy="161544"/>
+          </a:xfrm>
+          <a:prstGeom prst="line">
+            <a:avLst/>
+          </a:prstGeom>
+          <a:ln w="25400">
+            <a:solidFill>
+              <a:srgbClr val="9AA3AB"/>
+            </a:solidFill>
+            <a:tailEnd type="triangle"/>
+          </a:ln>
+        </p:spPr>
+        <p:style>
+          <a:lnRef idx="2">
+            <a:schemeClr val="accent1"/>
+          </a:lnRef>
+          <a:fillRef idx="0">
+            <a:schemeClr val="accent1"/>
+          </a:fillRef>
+          <a:effectRef idx="1">
+            <a:schemeClr val="accent1"/>
+          </a:effectRef>
+          <a:fontRef idx="minor">
+            <a:schemeClr val="tx1"/>
+          </a:fontRef>
+        </p:style>
+      </p:cxnSp>
+      <p:sp>
+        <p:nvSpPr>
+          <p:cNvPr id="13" name="Rounded Rectangle 12"/>
+          <p:cNvSpPr/>
+          <p:nvPr/>
+        </p:nvSpPr>
+        <p:spPr>
+          <a:xfrm>
+            <a:off x="5477256" y="3776472"/>
+            <a:ext cx="1591056" cy="566928"/>
+          </a:xfrm>
+          <a:prstGeom prst="roundRect">
+            <a:avLst>
+              <a:gd name="adj" fmla="val 12000"/>
+            </a:avLst>
+          </a:prstGeom>
+          <a:solidFill>
+            <a:srgbClr val="2E3338"/>
+          </a:solidFill>
+          <a:ln>
+            <a:noFill/>
+          </a:ln>
+          <a:effectLst/>
+        </p:spPr>
+        <p:style>
+          <a:lnRef idx="1">
+            <a:schemeClr val="accent1"/>
+          </a:lnRef>
+          <a:fillRef idx="3">
+            <a:schemeClr val="accent1"/>
+          </a:fillRef>
+          <a:effectRef idx="2">
+            <a:schemeClr val="accent1"/>
+          </a:effectRef>
+          <a:fontRef idx="minor">
+            <a:schemeClr val="lt1"/>
+          </a:fontRef>
+        </p:style>
+        <p:txBody>
+          <a:bodyPr rtlCol="0" anchor="ctr" wrap="square" lIns="73152" rIns="73152"/>
+          <a:lstStyle/>
+          <a:p>
+            <a:pPr algn="ctr"/>
+            <a:r>
+              <a:rPr sz="1300" b="1">
+                <a:solidFill>
+                  <a:srgbClr val="DEE2E6"/>
+                </a:solidFill>
+              </a:rPr>
+              <a:t>Camera</a:t>
+            </a:r>
+          </a:p>
+        </p:txBody>
+      </p:sp>
+      <p:cxnSp>
+        <p:nvCxnSpPr>
+          <p:cNvPr id="14" name="Connector 13"/>
+          <p:cNvCxnSpPr/>
+          <p:nvPr/>
+        </p:nvCxnSpPr>
+        <p:spPr>
+          <a:xfrm>
+            <a:off x="6272784" y="3596640"/>
+            <a:ext cx="0" cy="161544"/>
+          </a:xfrm>
+          <a:prstGeom prst="line">
+            <a:avLst/>
+          </a:prstGeom>
+          <a:ln w="25400">
+            <a:solidFill>
+              <a:srgbClr val="9AA3AB"/>
+            </a:solidFill>
+            <a:tailEnd type="triangle"/>
+          </a:ln>
+        </p:spPr>
+        <p:style>
+          <a:lnRef idx="2">
+            <a:schemeClr val="accent1"/>
+          </a:lnRef>
+          <a:fillRef idx="0">
+            <a:schemeClr val="accent1"/>
+          </a:fillRef>
+          <a:effectRef idx="1">
+            <a:schemeClr val="accent1"/>
+          </a:effectRef>
+          <a:fontRef idx="minor">
+            <a:schemeClr val="tx1"/>
+          </a:fontRef>
+        </p:style>
+      </p:cxnSp>
+      <p:sp>
+        <p:nvSpPr>
+          <p:cNvPr id="15" name="Rounded Rectangle 14"/>
+          <p:cNvSpPr/>
+          <p:nvPr/>
+        </p:nvSpPr>
+        <p:spPr>
+          <a:xfrm>
+            <a:off x="7178040" y="3776472"/>
+            <a:ext cx="1591056" cy="566928"/>
+          </a:xfrm>
+          <a:prstGeom prst="roundRect">
+            <a:avLst>
+              <a:gd name="adj" fmla="val 12000"/>
+            </a:avLst>
+          </a:prstGeom>
+          <a:solidFill>
+            <a:srgbClr val="2E3338"/>
+          </a:solidFill>
+          <a:ln>
+            <a:noFill/>
+          </a:ln>
+          <a:effectLst/>
+        </p:spPr>
+        <p:style>
+          <a:lnRef idx="1">
+            <a:schemeClr val="accent1"/>
+          </a:lnRef>
+          <a:fillRef idx="3">
+            <a:schemeClr val="accent1"/>
+          </a:fillRef>
+          <a:effectRef idx="2">
+            <a:schemeClr val="accent1"/>
+          </a:effectRef>
+          <a:fontRef idx="minor">
+            <a:schemeClr val="lt1"/>
+          </a:fontRef>
+        </p:style>
+        <p:txBody>
+          <a:bodyPr rtlCol="0" anchor="ctr" wrap="square" lIns="73152" rIns="73152"/>
+          <a:lstStyle/>
+          <a:p>
+            <a:pPr algn="ctr"/>
+            <a:r>
+              <a:rPr sz="1300" b="1">
+                <a:solidFill>
+                  <a:srgbClr val="DEE2E6"/>
+                </a:solidFill>
+              </a:rPr>
+              <a:t>Entities</a:t>
+            </a:r>
+          </a:p>
+          <a:p>
+            <a:pPr algn="ctr"/>
+            <a:r>
+              <a:rPr sz="1100" b="0">
+                <a:solidFill>
+                  <a:srgbClr val="9AA3AB"/>
+                </a:solidFill>
+              </a:rPr>
+              <a:t>player, slimes, coins, boxes</a:t>
+            </a:r>
+          </a:p>
+        </p:txBody>
+      </p:sp>
+      <p:cxnSp>
+        <p:nvCxnSpPr>
+          <p:cNvPr id="16" name="Connector 15"/>
+          <p:cNvCxnSpPr/>
+          <p:nvPr/>
+        </p:nvCxnSpPr>
+        <p:spPr>
+          <a:xfrm>
+            <a:off x="6272784" y="3596640"/>
+            <a:ext cx="1700784" cy="161544"/>
+          </a:xfrm>
+          <a:prstGeom prst="line">
+            <a:avLst/>
+          </a:prstGeom>
+          <a:ln w="25400">
+            <a:solidFill>
+              <a:srgbClr val="9AA3AB"/>
+            </a:solidFill>
+            <a:tailEnd type="triangle"/>
+          </a:ln>
+        </p:spPr>
+        <p:style>
+          <a:lnRef idx="2">
+            <a:schemeClr val="accent1"/>
+          </a:lnRef>
+          <a:fillRef idx="0">
+            <a:schemeClr val="accent1"/>
+          </a:fillRef>
+          <a:effectRef idx="1">
+            <a:schemeClr val="accent1"/>
+          </a:effectRef>
+          <a:fontRef idx="minor">
+            <a:schemeClr val="tx1"/>
+          </a:fontRef>
+        </p:style>
+      </p:cxnSp>
+      <p:cxnSp>
+        <p:nvCxnSpPr>
+          <p:cNvPr id="17" name="Connector 16"/>
+          <p:cNvCxnSpPr/>
+          <p:nvPr/>
+        </p:nvCxnSpPr>
+        <p:spPr>
+          <a:xfrm>
+            <a:off x="5422392" y="2831592"/>
+            <a:ext cx="850392" cy="161544"/>
+          </a:xfrm>
+          <a:prstGeom prst="line">
+            <a:avLst/>
+          </a:prstGeom>
+          <a:ln w="25400">
+            <a:solidFill>
+              <a:srgbClr val="9AA3AB"/>
+            </a:solidFill>
+            <a:tailEnd type="triangle"/>
+          </a:ln>
+        </p:spPr>
+        <p:style>
+          <a:lnRef idx="2">
+            <a:schemeClr val="accent1"/>
+          </a:lnRef>
+          <a:fillRef idx="0">
+            <a:schemeClr val="accent1"/>
+          </a:fillRef>
+          <a:effectRef idx="1">
+            <a:schemeClr val="accent1"/>
+          </a:effectRef>
+          <a:fontRef idx="minor">
+            <a:schemeClr val="tx1"/>
+          </a:fontRef>
+        </p:style>
+      </p:cxnSp>
+      <p:cxnSp>
+        <p:nvCxnSpPr>
+          <p:cNvPr id="18" name="Connector 17"/>
+          <p:cNvCxnSpPr/>
+          <p:nvPr/>
+        </p:nvCxnSpPr>
+        <p:spPr>
+          <a:xfrm>
+            <a:off x="4572000" y="2066544"/>
+            <a:ext cx="850392" cy="161544"/>
+          </a:xfrm>
+          <a:prstGeom prst="line">
+            <a:avLst/>
+          </a:prstGeom>
+          <a:ln w="25400">
+            <a:solidFill>
+              <a:srgbClr val="9AA3AB"/>
+            </a:solidFill>
+            <a:tailEnd type="triangle"/>
+          </a:ln>
+        </p:spPr>
+        <p:style>
+          <a:lnRef idx="2">
+            <a:schemeClr val="accent1"/>
+          </a:lnRef>
+          <a:fillRef idx="0">
+            <a:schemeClr val="accent1"/>
+          </a:fillRef>
+          <a:effectRef idx="1">
+            <a:schemeClr val="accent1"/>
+          </a:effectRef>
+          <a:fontRef idx="minor">
+            <a:schemeClr val="tx1"/>
+          </a:fontRef>
+        </p:style>
+      </p:cxnSp>
+      <p:sp>
+        <p:nvSpPr>
+          <p:cNvPr id="19" name="TextBox 18"/>
+          <p:cNvSpPr txBox="1"/>
+          <p:nvPr/>
+        </p:nvSpPr>
+        <p:spPr>
+          <a:xfrm>
+            <a:off x="457200" y="4462272"/>
+            <a:ext cx="8229600" cy="365760"/>
+          </a:xfrm>
+          <a:prstGeom prst="rect">
+            <a:avLst/>
+          </a:prstGeom>
+          <a:noFill/>
+        </p:spPr>
+        <p:txBody>
+          <a:bodyPr wrap="square">
+            <a:spAutoFit/>
+          </a:bodyPr>
+          <a:lstStyle/>
+          <a:p>
+            <a:pPr algn="ctr"/>
+            <a:r>
+              <a:rPr sz="1300" b="0" i="0">
+                <a:solidFill>
+                  <a:srgbClr val="9AA3AB"/>
+                </a:solidFill>
+              </a:rPr>
+              <a:t>Three kinds of state in one game: the game’s, the player’s and each slime’s.</a:t>
+            </a:r>
+          </a:p>
+        </p:txBody>
+      </p:sp>
+    </p:spTree>
+  </p:cSld>
+  <p:clrMapOvr>
+    <a:masterClrMapping/>
+  </p:clrMapOvr>
+</p:sld>
+</file>
+
+<file path=ppt/slides/slide48.xml><?xml version="1.0" encoding="utf-8"?>
+<p:sld xmlns:a="http://schemas.openxmlformats.org/drawingml/2006/main" xmlns:p="http://schemas.openxmlformats.org/presentationml/2006/main" xmlns:r="http://schemas.openxmlformats.org/officeDocument/2006/relationships">
+  <p:cSld>
+    <p:spTree>
+      <p:nvGrpSpPr>
+        <p:cNvPr id="1" name=""/>
+        <p:cNvGrpSpPr/>
+        <p:nvPr/>
+      </p:nvGrpSpPr>
+      <p:grpSpPr/>
+      <p:sp>
+        <p:nvSpPr>
+          <p:cNvPr id="2" name="Title 1"/>
+          <p:cNvSpPr>
+            <a:spLocks noGrp="1"/>
+          </p:cNvSpPr>
+          <p:nvPr>
+            <p:ph type="title"/>
+          </p:nvPr>
+        </p:nvSpPr>
+        <p:spPr/>
+        <p:txBody>
+          <a:bodyPr/>
+          <a:lstStyle/>
+          <a:p>
+            <a:pPr indent="0" lvl="0" marL="0" rtl="0" algn="l">
+              <a:spcBef>
+                <a:spcPts val="0"/>
+              </a:spcBef>
+              <a:spcAft>
+                <a:spcPts val="0"/>
+              </a:spcAft>
+              <a:buNone/>
+            </a:pPr>
+            <a:r>
+              <a:rPr lang="en"/>
+              <a:t>Summary</a:t>
+            </a:r>
+            <a:endParaRPr/>
+          </a:p>
+        </p:txBody>
+      </p:sp>
+      <p:sp>
+        <p:nvSpPr>
+          <p:cNvPr id="3" name="Text Placeholder 2"/>
+          <p:cNvSpPr>
+            <a:spLocks noGrp="1"/>
+          </p:cNvSpPr>
+          <p:nvPr>
+            <p:ph type="body" idx="1"/>
+          </p:nvPr>
+        </p:nvSpPr>
+        <p:spPr>
+          <a:xfrm>
+            <a:off x="311700" y="885950"/>
+            <a:ext cx="8520600" cy="521208"/>
+          </a:xfrm>
+        </p:spPr>
+        <p:txBody>
+          <a:bodyPr/>
+          <a:lstStyle/>
+          <a:p>
+            <a:pPr indent="-330200" lvl="0" marL="457200" rtl="0" algn="l">
+              <a:spcBef>
+                <a:spcPts val="0"/>
+              </a:spcBef>
+              <a:spcAft>
+                <a:spcPts val="0"/>
+              </a:spcAft>
+              <a:buSzPts val="1600"/>
+              <a:buChar char="●"/>
+            </a:pPr>
+            <a:r>
+              <a:rPr lang="en" b="1"/>
+              <a:t>Seven concerns, and this session’s answer to each.</a:t>
+            </a:r>
+            <a:endParaRPr/>
+          </a:p>
+        </p:txBody>
+      </p:sp>
+      <p:sp>
+        <p:nvSpPr>
+          <p:cNvPr id="4" name="Rounded Rectangle 3"/>
+          <p:cNvSpPr/>
+          <p:nvPr/>
+        </p:nvSpPr>
+        <p:spPr>
+          <a:xfrm>
+            <a:off x="548640" y="1417320"/>
+            <a:ext cx="2560320" cy="841248"/>
+          </a:xfrm>
+          <a:prstGeom prst="roundRect">
+            <a:avLst>
+              <a:gd name="adj" fmla="val 12000"/>
+            </a:avLst>
+          </a:prstGeom>
+          <a:solidFill>
+            <a:srgbClr val="2E3338"/>
+          </a:solidFill>
+          <a:ln>
+            <a:noFill/>
+          </a:ln>
+          <a:effectLst/>
+        </p:spPr>
+        <p:style>
+          <a:lnRef idx="1">
+            <a:schemeClr val="accent1"/>
+          </a:lnRef>
+          <a:fillRef idx="3">
+            <a:schemeClr val="accent1"/>
+          </a:fillRef>
+          <a:effectRef idx="2">
+            <a:schemeClr val="accent1"/>
+          </a:effectRef>
+          <a:fontRef idx="minor">
+            <a:schemeClr val="lt1"/>
+          </a:fontRef>
+        </p:style>
+        <p:txBody>
+          <a:bodyPr rtlCol="0" anchor="ctr" wrap="square" lIns="73152" rIns="73152"/>
+          <a:lstStyle/>
+          <a:p>
+            <a:pPr algn="ctr"/>
+            <a:r>
+              <a:rPr sz="1500" b="1">
+                <a:solidFill>
+                  <a:srgbClr val="DEE2E6"/>
+                </a:solidFill>
+              </a:rPr>
+              <a:t>What the level is made of</a:t>
+            </a:r>
+          </a:p>
+          <a:p>
+            <a:pPr algn="ctr"/>
+            <a:r>
+              <a:rPr sz="1300" b="0">
+                <a:solidFill>
+                  <a:srgbClr val="9AA3AB"/>
+                </a:solidFill>
+              </a:rPr>
+              <a:t>Tilemaps, built by level makers</a:t>
+            </a:r>
+          </a:p>
+        </p:txBody>
+      </p:sp>
+      <p:sp>
+        <p:nvSpPr>
+          <p:cNvPr id="5" name="Rounded Rectangle 4"/>
+          <p:cNvSpPr/>
+          <p:nvPr/>
+        </p:nvSpPr>
+        <p:spPr>
+          <a:xfrm>
+            <a:off x="3291840" y="1417320"/>
+            <a:ext cx="2560320" cy="841248"/>
+          </a:xfrm>
+          <a:prstGeom prst="roundRect">
+            <a:avLst>
+              <a:gd name="adj" fmla="val 12000"/>
+            </a:avLst>
+          </a:prstGeom>
+          <a:solidFill>
+            <a:srgbClr val="2E3338"/>
+          </a:solidFill>
+          <a:ln>
+            <a:noFill/>
+          </a:ln>
+          <a:effectLst/>
+        </p:spPr>
+        <p:style>
+          <a:lnRef idx="1">
+            <a:schemeClr val="accent1"/>
+          </a:lnRef>
+          <a:fillRef idx="3">
+            <a:schemeClr val="accent1"/>
+          </a:fillRef>
+          <a:effectRef idx="2">
+            <a:schemeClr val="accent1"/>
+          </a:effectRef>
+          <a:fontRef idx="minor">
+            <a:schemeClr val="lt1"/>
+          </a:fontRef>
+        </p:style>
+        <p:txBody>
+          <a:bodyPr rtlCol="0" anchor="ctr" wrap="square" lIns="73152" rIns="73152"/>
+          <a:lstStyle/>
+          <a:p>
+            <a:pPr algn="ctr"/>
+            <a:r>
+              <a:rPr sz="1500" b="1">
+                <a:solidFill>
+                  <a:srgbClr val="DEE2E6"/>
+                </a:solidFill>
+              </a:rPr>
+              <a:t>Things that move</a:t>
+            </a:r>
+          </a:p>
+          <a:p>
+            <a:pPr algn="ctr"/>
+            <a:r>
+              <a:rPr sz="1300" b="0">
+                <a:solidFill>
+                  <a:srgbClr val="9AA3AB"/>
+                </a:solidFill>
+              </a:rPr>
+              <a:t>Entities, in a list</a:t>
+            </a:r>
+          </a:p>
+        </p:txBody>
+      </p:sp>
+      <p:sp>
+        <p:nvSpPr>
+          <p:cNvPr id="6" name="Rounded Rectangle 5"/>
+          <p:cNvSpPr/>
+          <p:nvPr/>
+        </p:nvSpPr>
+        <p:spPr>
+          <a:xfrm>
+            <a:off x="6035040" y="1417320"/>
+            <a:ext cx="2560320" cy="841248"/>
+          </a:xfrm>
+          <a:prstGeom prst="roundRect">
+            <a:avLst>
+              <a:gd name="adj" fmla="val 12000"/>
+            </a:avLst>
+          </a:prstGeom>
+          <a:solidFill>
+            <a:srgbClr val="2E3338"/>
+          </a:solidFill>
+          <a:ln>
+            <a:noFill/>
+          </a:ln>
+          <a:effectLst/>
+        </p:spPr>
+        <p:style>
+          <a:lnRef idx="1">
+            <a:schemeClr val="accent1"/>
+          </a:lnRef>
+          <a:fillRef idx="3">
+            <a:schemeClr val="accent1"/>
+          </a:fillRef>
+          <a:effectRef idx="2">
+            <a:schemeClr val="accent1"/>
+          </a:effectRef>
+          <a:fontRef idx="minor">
+            <a:schemeClr val="lt1"/>
+          </a:fontRef>
+        </p:style>
+        <p:txBody>
+          <a:bodyPr rtlCol="0" anchor="ctr" wrap="square" lIns="73152" rIns="73152"/>
+          <a:lstStyle/>
+          <a:p>
+            <a:pPr algn="ctr"/>
+            <a:r>
+              <a:rPr sz="1500" b="1">
+                <a:solidFill>
+                  <a:srgbClr val="DEE2E6"/>
+                </a:solidFill>
+              </a:rPr>
+              <a:t>Whether a spot is solid</a:t>
+            </a:r>
+          </a:p>
+          <a:p>
+            <a:pPr algn="ctr"/>
+            <a:r>
+              <a:rPr sz="1300" b="0">
+                <a:solidFill>
+                  <a:srgbClr val="9AA3AB"/>
+                </a:solidFill>
+              </a:rPr>
+              <a:t>One lookup in the grid, O(1)</a:t>
+            </a:r>
+          </a:p>
+        </p:txBody>
+      </p:sp>
+      <p:sp>
+        <p:nvSpPr>
+          <p:cNvPr id="7" name="Rounded Rectangle 6"/>
+          <p:cNvSpPr/>
+          <p:nvPr/>
+        </p:nvSpPr>
+        <p:spPr>
+          <a:xfrm>
+            <a:off x="548640" y="2395728"/>
+            <a:ext cx="2560320" cy="841248"/>
+          </a:xfrm>
+          <a:prstGeom prst="roundRect">
+            <a:avLst>
+              <a:gd name="adj" fmla="val 12000"/>
+            </a:avLst>
+          </a:prstGeom>
+          <a:solidFill>
+            <a:srgbClr val="2E3338"/>
+          </a:solidFill>
+          <a:ln>
+            <a:noFill/>
+          </a:ln>
+          <a:effectLst/>
+        </p:spPr>
+        <p:style>
+          <a:lnRef idx="1">
+            <a:schemeClr val="accent1"/>
+          </a:lnRef>
+          <a:fillRef idx="3">
+            <a:schemeClr val="accent1"/>
+          </a:fillRef>
+          <a:effectRef idx="2">
+            <a:schemeClr val="accent1"/>
+          </a:effectRef>
+          <a:fontRef idx="minor">
+            <a:schemeClr val="lt1"/>
+          </a:fontRef>
+        </p:style>
+        <p:txBody>
+          <a:bodyPr rtlCol="0" anchor="ctr" wrap="square" lIns="73152" rIns="73152"/>
+          <a:lstStyle/>
+          <a:p>
+            <a:pPr algn="ctr"/>
+            <a:r>
+              <a:rPr sz="1500" b="1">
+                <a:solidFill>
+                  <a:srgbClr val="DEE2E6"/>
+                </a:solidFill>
+              </a:rPr>
+              <a:t>Stopping at a wall</a:t>
+            </a:r>
+          </a:p>
+          <a:p>
+            <a:pPr algn="ctr"/>
+            <a:r>
+              <a:rPr sz="1300" b="0">
+                <a:solidFill>
+                  <a:srgbClr val="9AA3AB"/>
+                </a:solidFill>
+              </a:rPr>
+              <a:t>Move, then snap, an axis at a time</a:t>
+            </a:r>
+          </a:p>
+        </p:txBody>
+      </p:sp>
+      <p:sp>
+        <p:nvSpPr>
+          <p:cNvPr id="8" name="Rounded Rectangle 7"/>
+          <p:cNvSpPr/>
+          <p:nvPr/>
+        </p:nvSpPr>
+        <p:spPr>
+          <a:xfrm>
+            <a:off x="3291840" y="2395728"/>
+            <a:ext cx="2560320" cy="841248"/>
+          </a:xfrm>
+          <a:prstGeom prst="roundRect">
+            <a:avLst>
+              <a:gd name="adj" fmla="val 12000"/>
+            </a:avLst>
+          </a:prstGeom>
+          <a:solidFill>
+            <a:srgbClr val="2E3338"/>
+          </a:solidFill>
+          <a:ln>
+            <a:noFill/>
+          </a:ln>
+          <a:effectLst/>
+        </p:spPr>
+        <p:style>
+          <a:lnRef idx="1">
+            <a:schemeClr val="accent1"/>
+          </a:lnRef>
+          <a:fillRef idx="3">
+            <a:schemeClr val="accent1"/>
+          </a:fillRef>
+          <a:effectRef idx="2">
+            <a:schemeClr val="accent1"/>
+          </a:effectRef>
+          <a:fontRef idx="minor">
+            <a:schemeClr val="lt1"/>
+          </a:fontRef>
+        </p:style>
+        <p:txBody>
+          <a:bodyPr rtlCol="0" anchor="ctr" wrap="square" lIns="73152" rIns="73152"/>
+          <a:lstStyle/>
+          <a:p>
+            <a:pPr algn="ctr"/>
+            <a:r>
+              <a:rPr sz="1500" b="1">
+                <a:solidFill>
+                  <a:srgbClr val="DEE2E6"/>
+                </a:solidFill>
+              </a:rPr>
+              <a:t>What the player is doing</a:t>
+            </a:r>
+          </a:p>
+          <a:p>
+            <a:pPr algn="ctr"/>
+            <a:r>
+              <a:rPr sz="1300" b="0">
+                <a:solidFill>
+                  <a:srgbClr val="9AA3AB"/>
+                </a:solidFill>
+              </a:rPr>
+              <a:t>States sharing a base state</a:t>
+            </a:r>
+          </a:p>
+        </p:txBody>
+      </p:sp>
+      <p:sp>
+        <p:nvSpPr>
+          <p:cNvPr id="9" name="Rounded Rectangle 8"/>
+          <p:cNvSpPr/>
+          <p:nvPr/>
+        </p:nvSpPr>
+        <p:spPr>
+          <a:xfrm>
+            <a:off x="6035040" y="2395728"/>
+            <a:ext cx="2560320" cy="841248"/>
+          </a:xfrm>
+          <a:prstGeom prst="roundRect">
+            <a:avLst>
+              <a:gd name="adj" fmla="val 12000"/>
+            </a:avLst>
+          </a:prstGeom>
+          <a:solidFill>
+            <a:srgbClr val="2E3338"/>
+          </a:solidFill>
+          <a:ln>
+            <a:noFill/>
+          </a:ln>
+          <a:effectLst/>
+        </p:spPr>
+        <p:style>
+          <a:lnRef idx="1">
+            <a:schemeClr val="accent1"/>
+          </a:lnRef>
+          <a:fillRef idx="3">
+            <a:schemeClr val="accent1"/>
+          </a:fillRef>
+          <a:effectRef idx="2">
+            <a:schemeClr val="accent1"/>
+          </a:effectRef>
+          <a:fontRef idx="minor">
+            <a:schemeClr val="lt1"/>
+          </a:fontRef>
+        </p:style>
+        <p:txBody>
+          <a:bodyPr rtlCol="0" anchor="ctr" wrap="square" lIns="73152" rIns="73152"/>
+          <a:lstStyle/>
+          <a:p>
+            <a:pPr algn="ctr"/>
+            <a:r>
+              <a:rPr sz="1500" b="1">
+                <a:solidFill>
+                  <a:srgbClr val="DEE2E6"/>
+                </a:solidFill>
+              </a:rPr>
+              <a:t>A level wider than the screen</a:t>
+            </a:r>
+          </a:p>
+          <a:p>
+            <a:pPr algn="ctr"/>
+            <a:r>
+              <a:rPr sz="1300" b="0">
+                <a:solidFill>
+                  <a:srgbClr val="9AA3AB"/>
+                </a:solidFill>
+              </a:rPr>
+              <a:t>A camera transform</a:t>
+            </a:r>
+          </a:p>
+        </p:txBody>
+      </p:sp>
+      <p:sp>
+        <p:nvSpPr>
+          <p:cNvPr id="10" name="Rounded Rectangle 9"/>
+          <p:cNvSpPr/>
+          <p:nvPr/>
+        </p:nvSpPr>
+        <p:spPr>
+          <a:xfrm>
+            <a:off x="3291840" y="3374136"/>
+            <a:ext cx="2560320" cy="841248"/>
+          </a:xfrm>
+          <a:prstGeom prst="roundRect">
+            <a:avLst>
+              <a:gd name="adj" fmla="val 12000"/>
+            </a:avLst>
+          </a:prstGeom>
+          <a:solidFill>
+            <a:srgbClr val="2E3338"/>
+          </a:solidFill>
+          <a:ln>
+            <a:noFill/>
+          </a:ln>
+          <a:effectLst/>
+        </p:spPr>
+        <p:style>
+          <a:lnRef idx="1">
+            <a:schemeClr val="accent1"/>
+          </a:lnRef>
+          <a:fillRef idx="3">
+            <a:schemeClr val="accent1"/>
+          </a:fillRef>
+          <a:effectRef idx="2">
+            <a:schemeClr val="accent1"/>
+          </a:effectRef>
+          <a:fontRef idx="minor">
+            <a:schemeClr val="lt1"/>
+          </a:fontRef>
+        </p:style>
+        <p:txBody>
+          <a:bodyPr rtlCol="0" anchor="ctr" wrap="square" lIns="73152" rIns="73152"/>
+          <a:lstStyle/>
+          <a:p>
+            <a:pPr algn="ctr"/>
+            <a:r>
+              <a:rPr sz="1500" b="1">
+                <a:solidFill>
+                  <a:srgbClr val="DEE2E6"/>
+                </a:solidFill>
+              </a:rPr>
+              <a:t>Seeing the collision code</a:t>
+            </a:r>
+          </a:p>
+          <a:p>
+            <a:pPr algn="ctr"/>
+            <a:r>
+              <a:rPr sz="1300" b="0">
+                <a:solidFill>
+                  <a:srgbClr val="9AA3AB"/>
+                </a:solidFill>
+              </a:rPr>
+              <a:t>Debug drawing</a:t>
+            </a:r>
+          </a:p>
+        </p:txBody>
+      </p:sp>
+    </p:spTree>
+  </p:cSld>
+  <p:clrMapOvr>
+    <a:masterClrMapping/>
+  </p:clrMapOvr>
+</p:sld>
+</file>
+
 <file path=ppt/slides/slide5.xml><?xml version="1.0" encoding="utf-8"?>
 <p:sld xmlns:a="http://schemas.openxmlformats.org/drawingml/2006/main" xmlns:r="http://schemas.openxmlformats.org/officeDocument/2006/relationships" xmlns:mc="http://schemas.openxmlformats.org/markup-compatibility/2006" xmlns:mv="urn:schemas-microsoft-com:mac:vml" xmlns:p="http://schemas.openxmlformats.org/presentationml/2006/main" xmlns:c="http://schemas.openxmlformats.org/drawingml/2006/chart" xmlns:dgm="http://schemas.openxmlformats.org/drawingml/2006/diagram" xmlns:o="urn:schemas-microsoft-com:office:office" xmlns:v="urn:schemas-microsoft-com:vml" xmlns:pvml="urn:schemas-microsoft-com:office:powerpoint" xmlns:com="http://schemas.openxmlformats.org/drawingml/2006/compatibility" xmlns:p14="http://schemas.microsoft.com/office/powerpoint/2010/main" xmlns:p15="http://schemas.microsoft.com/office/powerpoint/2012/main" xmlns:ahyp="http://schemas.microsoft.com/office/drawing/2018/hyperlinkcolor">
   <p:cSld>

--- a/slides/06 Super Mario Bros.pptx
+++ b/slides/06 Super Mario Bros.pptx
@@ -2029,7 +2029,7 @@
           </a:p>
           <a:p>
             <a:r>
-              <a:t>So it runs across a one-tile pit without falling in</a:t>
+              <a:t>It then runs across a one-tile pit without falling in</a:t>
             </a:r>
           </a:p>
           <a:p>
@@ -2128,7 +2128,7 @@
           <a:lstStyle/>
           <a:p>
             <a:r>
-              <a:t>Two points per direction, at the hitbox’s corners (the red dots), slightly inset. Ask: why inset? So you can jump up next to a wall without catching it.</a:t>
+              <a:t>Two points per direction, at the hitbox’s corners (the red dots), slightly inset. Ask: why inset? To let you jump up next to a wall without catching it.</a:t>
             </a:r>
           </a:p>
         </p:txBody>
@@ -28081,6 +28081,1401 @@
 </file>
 
 <file path=ppt/slides/slide42.xml><?xml version="1.0" encoding="utf-8"?>
+<p:sld xmlns:a="http://schemas.openxmlformats.org/drawingml/2006/main" xmlns:p="http://schemas.openxmlformats.org/presentationml/2006/main" xmlns:r="http://schemas.openxmlformats.org/officeDocument/2006/relationships">
+  <p:cSld>
+    <p:spTree>
+      <p:nvGrpSpPr>
+        <p:cNvPr id="1" name=""/>
+        <p:cNvGrpSpPr/>
+        <p:nvPr/>
+      </p:nvGrpSpPr>
+      <p:grpSpPr/>
+      <p:sp>
+        <p:nvSpPr>
+          <p:cNvPr id="2" name="Title 1"/>
+          <p:cNvSpPr>
+            <a:spLocks noGrp="1"/>
+          </p:cNvSpPr>
+          <p:nvPr>
+            <p:ph type="title"/>
+          </p:nvPr>
+        </p:nvSpPr>
+        <p:spPr/>
+        <p:txBody>
+          <a:bodyPr/>
+          <a:lstStyle/>
+          <a:p>
+            <a:pPr indent="0" lvl="0" marL="0" rtl="0" algn="l">
+              <a:spcBef>
+                <a:spcPts val="0"/>
+              </a:spcBef>
+              <a:spcAft>
+                <a:spcPts val="0"/>
+              </a:spcAft>
+              <a:buNone/>
+            </a:pPr>
+            <a:r>
+              <a:rPr lang="en"/>
+              <a:t>The Whole Game</a:t>
+            </a:r>
+            <a:endParaRPr/>
+          </a:p>
+        </p:txBody>
+      </p:sp>
+      <p:sp>
+        <p:nvSpPr>
+          <p:cNvPr id="3" name="Text Placeholder 2"/>
+          <p:cNvSpPr>
+            <a:spLocks noGrp="1"/>
+          </p:cNvSpPr>
+          <p:nvPr>
+            <p:ph type="body" idx="1"/>
+          </p:nvPr>
+        </p:nvSpPr>
+        <p:spPr>
+          <a:xfrm>
+            <a:off x="311700" y="885950"/>
+            <a:ext cx="8520600" cy="521208"/>
+          </a:xfrm>
+        </p:spPr>
+        <p:txBody>
+          <a:bodyPr/>
+          <a:lstStyle/>
+          <a:p>
+            <a:pPr indent="-330200" lvl="0" marL="457200" rtl="0" algn="l">
+              <a:spcBef>
+                <a:spcPts val="0"/>
+              </a:spcBef>
+              <a:spcAft>
+                <a:spcPts val="0"/>
+              </a:spcAft>
+              <a:buSzPts val="1600"/>
+              <a:buChar char="●"/>
+            </a:pPr>
+            <a:r>
+              <a:rPr lang="en" b="1"/>
+              <a:t>Mario8 adds music and sounds. A level maker builds the level the play state holds.</a:t>
+            </a:r>
+            <a:endParaRPr/>
+          </a:p>
+        </p:txBody>
+      </p:sp>
+      <p:sp>
+        <p:nvSpPr>
+          <p:cNvPr id="4" name="Rounded Rectangle 3"/>
+          <p:cNvSpPr/>
+          <p:nvPr/>
+        </p:nvSpPr>
+        <p:spPr>
+          <a:xfrm>
+            <a:off x="3429000" y="1481328"/>
+            <a:ext cx="2286000" cy="566928"/>
+          </a:xfrm>
+          <a:prstGeom prst="roundRect">
+            <a:avLst>
+              <a:gd name="adj" fmla="val 12000"/>
+            </a:avLst>
+          </a:prstGeom>
+          <a:solidFill>
+            <a:srgbClr val="2E3338"/>
+          </a:solidFill>
+          <a:ln w="25400">
+            <a:solidFill>
+              <a:srgbClr val="D45D35"/>
+            </a:solidFill>
+          </a:ln>
+          <a:effectLst/>
+        </p:spPr>
+        <p:style>
+          <a:lnRef idx="1">
+            <a:schemeClr val="accent1"/>
+          </a:lnRef>
+          <a:fillRef idx="3">
+            <a:schemeClr val="accent1"/>
+          </a:fillRef>
+          <a:effectRef idx="2">
+            <a:schemeClr val="accent1"/>
+          </a:effectRef>
+          <a:fontRef idx="minor">
+            <a:schemeClr val="lt1"/>
+          </a:fontRef>
+        </p:style>
+        <p:txBody>
+          <a:bodyPr rtlCol="0" anchor="ctr" wrap="square" lIns="73152" rIns="73152"/>
+          <a:lstStyle/>
+          <a:p>
+            <a:pPr algn="ctr"/>
+            <a:r>
+              <a:rPr sz="1300" b="1">
+                <a:solidFill>
+                  <a:srgbClr val="DEE2E6"/>
+                </a:solidFill>
+              </a:rPr>
+              <a:t>Game1 : Core</a:t>
+            </a:r>
+          </a:p>
+          <a:p>
+            <a:pPr algn="ctr"/>
+            <a:r>
+              <a:rPr sz="1100" b="0">
+                <a:solidFill>
+                  <a:srgbClr val="9AA3AB"/>
+                </a:solidFill>
+              </a:rPr>
+              <a:t>the current game state</a:t>
+            </a:r>
+          </a:p>
+        </p:txBody>
+      </p:sp>
+      <p:sp>
+        <p:nvSpPr>
+          <p:cNvPr id="5" name="Rounded Rectangle 4"/>
+          <p:cNvSpPr/>
+          <p:nvPr/>
+        </p:nvSpPr>
+        <p:spPr>
+          <a:xfrm>
+            <a:off x="374903" y="2246376"/>
+            <a:ext cx="1591056" cy="566928"/>
+          </a:xfrm>
+          <a:prstGeom prst="roundRect">
+            <a:avLst>
+              <a:gd name="adj" fmla="val 12000"/>
+            </a:avLst>
+          </a:prstGeom>
+          <a:solidFill>
+            <a:srgbClr val="2E3338"/>
+          </a:solidFill>
+          <a:ln>
+            <a:noFill/>
+          </a:ln>
+          <a:effectLst/>
+        </p:spPr>
+        <p:style>
+          <a:lnRef idx="1">
+            <a:schemeClr val="accent1"/>
+          </a:lnRef>
+          <a:fillRef idx="3">
+            <a:schemeClr val="accent1"/>
+          </a:fillRef>
+          <a:effectRef idx="2">
+            <a:schemeClr val="accent1"/>
+          </a:effectRef>
+          <a:fontRef idx="minor">
+            <a:schemeClr val="lt1"/>
+          </a:fontRef>
+        </p:style>
+        <p:txBody>
+          <a:bodyPr rtlCol="0" anchor="ctr" wrap="square" lIns="73152" rIns="73152"/>
+          <a:lstStyle/>
+          <a:p>
+            <a:pPr algn="ctr"/>
+            <a:r>
+              <a:rPr sz="1300" b="1">
+                <a:solidFill>
+                  <a:srgbClr val="DEE2E6"/>
+                </a:solidFill>
+              </a:rPr>
+              <a:t>StartState</a:t>
+            </a:r>
+          </a:p>
+        </p:txBody>
+      </p:sp>
+      <p:cxnSp>
+        <p:nvCxnSpPr>
+          <p:cNvPr id="6" name="Connector 5"/>
+          <p:cNvCxnSpPr/>
+          <p:nvPr/>
+        </p:nvCxnSpPr>
+        <p:spPr>
+          <a:xfrm flipH="1">
+            <a:off x="1170432" y="2066544"/>
+            <a:ext cx="3401568" cy="161544"/>
+          </a:xfrm>
+          <a:prstGeom prst="line">
+            <a:avLst/>
+          </a:prstGeom>
+          <a:ln w="25400">
+            <a:solidFill>
+              <a:srgbClr val="9AA3AB"/>
+            </a:solidFill>
+            <a:tailEnd type="triangle"/>
+          </a:ln>
+        </p:spPr>
+        <p:style>
+          <a:lnRef idx="2">
+            <a:schemeClr val="accent1"/>
+          </a:lnRef>
+          <a:fillRef idx="0">
+            <a:schemeClr val="accent1"/>
+          </a:fillRef>
+          <a:effectRef idx="1">
+            <a:schemeClr val="accent1"/>
+          </a:effectRef>
+          <a:fontRef idx="minor">
+            <a:schemeClr val="tx1"/>
+          </a:fontRef>
+        </p:style>
+      </p:cxnSp>
+      <p:sp>
+        <p:nvSpPr>
+          <p:cNvPr id="7" name="Rounded Rectangle 6"/>
+          <p:cNvSpPr/>
+          <p:nvPr/>
+        </p:nvSpPr>
+        <p:spPr>
+          <a:xfrm>
+            <a:off x="4279392" y="2246376"/>
+            <a:ext cx="2286000" cy="566928"/>
+          </a:xfrm>
+          <a:prstGeom prst="roundRect">
+            <a:avLst>
+              <a:gd name="adj" fmla="val 12000"/>
+            </a:avLst>
+          </a:prstGeom>
+          <a:solidFill>
+            <a:srgbClr val="2E3338"/>
+          </a:solidFill>
+          <a:ln>
+            <a:noFill/>
+          </a:ln>
+          <a:effectLst/>
+        </p:spPr>
+        <p:style>
+          <a:lnRef idx="1">
+            <a:schemeClr val="accent1"/>
+          </a:lnRef>
+          <a:fillRef idx="3">
+            <a:schemeClr val="accent1"/>
+          </a:fillRef>
+          <a:effectRef idx="2">
+            <a:schemeClr val="accent1"/>
+          </a:effectRef>
+          <a:fontRef idx="minor">
+            <a:schemeClr val="lt1"/>
+          </a:fontRef>
+        </p:style>
+        <p:txBody>
+          <a:bodyPr rtlCol="0" anchor="ctr" wrap="square" lIns="73152" rIns="73152"/>
+          <a:lstStyle/>
+          <a:p>
+            <a:pPr algn="ctr"/>
+            <a:r>
+              <a:rPr sz="1300" b="1">
+                <a:solidFill>
+                  <a:srgbClr val="DEE2E6"/>
+                </a:solidFill>
+              </a:rPr>
+              <a:t>PlayState</a:t>
+            </a:r>
+          </a:p>
+        </p:txBody>
+      </p:sp>
+      <p:sp>
+        <p:nvSpPr>
+          <p:cNvPr id="8" name="Rounded Rectangle 7"/>
+          <p:cNvSpPr/>
+          <p:nvPr/>
+        </p:nvSpPr>
+        <p:spPr>
+          <a:xfrm>
+            <a:off x="2075688" y="3011424"/>
+            <a:ext cx="1591056" cy="566928"/>
+          </a:xfrm>
+          <a:prstGeom prst="roundRect">
+            <a:avLst>
+              <a:gd name="adj" fmla="val 12000"/>
+            </a:avLst>
+          </a:prstGeom>
+          <a:solidFill>
+            <a:srgbClr val="2E3338"/>
+          </a:solidFill>
+          <a:ln>
+            <a:noFill/>
+          </a:ln>
+          <a:effectLst/>
+        </p:spPr>
+        <p:style>
+          <a:lnRef idx="1">
+            <a:schemeClr val="accent1"/>
+          </a:lnRef>
+          <a:fillRef idx="3">
+            <a:schemeClr val="accent1"/>
+          </a:fillRef>
+          <a:effectRef idx="2">
+            <a:schemeClr val="accent1"/>
+          </a:effectRef>
+          <a:fontRef idx="minor">
+            <a:schemeClr val="lt1"/>
+          </a:fontRef>
+        </p:style>
+        <p:txBody>
+          <a:bodyPr rtlCol="0" anchor="ctr" wrap="square" lIns="73152" rIns="73152"/>
+          <a:lstStyle/>
+          <a:p>
+            <a:pPr algn="ctr"/>
+            <a:r>
+              <a:rPr sz="1300" b="1">
+                <a:solidFill>
+                  <a:srgbClr val="DEE2E6"/>
+                </a:solidFill>
+              </a:rPr>
+              <a:t>Level maker</a:t>
+            </a:r>
+          </a:p>
+          <a:p>
+            <a:pPr algn="ctr"/>
+            <a:r>
+              <a:rPr sz="1100" b="0">
+                <a:solidFill>
+                  <a:srgbClr val="9AA3AB"/>
+                </a:solidFill>
+              </a:rPr>
+              <a:t>builds the level</a:t>
+            </a:r>
+          </a:p>
+        </p:txBody>
+      </p:sp>
+      <p:cxnSp>
+        <p:nvCxnSpPr>
+          <p:cNvPr id="9" name="Connector 8"/>
+          <p:cNvCxnSpPr/>
+          <p:nvPr/>
+        </p:nvCxnSpPr>
+        <p:spPr>
+          <a:xfrm flipH="1">
+            <a:off x="2871216" y="2831592"/>
+            <a:ext cx="2551176" cy="161544"/>
+          </a:xfrm>
+          <a:prstGeom prst="line">
+            <a:avLst/>
+          </a:prstGeom>
+          <a:ln w="25400">
+            <a:solidFill>
+              <a:srgbClr val="9AA3AB"/>
+            </a:solidFill>
+            <a:tailEnd type="triangle"/>
+          </a:ln>
+        </p:spPr>
+        <p:style>
+          <a:lnRef idx="2">
+            <a:schemeClr val="accent1"/>
+          </a:lnRef>
+          <a:fillRef idx="0">
+            <a:schemeClr val="accent1"/>
+          </a:fillRef>
+          <a:effectRef idx="1">
+            <a:schemeClr val="accent1"/>
+          </a:effectRef>
+          <a:fontRef idx="minor">
+            <a:schemeClr val="tx1"/>
+          </a:fontRef>
+        </p:style>
+      </p:cxnSp>
+      <p:sp>
+        <p:nvSpPr>
+          <p:cNvPr id="10" name="Rounded Rectangle 9"/>
+          <p:cNvSpPr/>
+          <p:nvPr/>
+        </p:nvSpPr>
+        <p:spPr>
+          <a:xfrm>
+            <a:off x="5129784" y="3011424"/>
+            <a:ext cx="2286000" cy="566928"/>
+          </a:xfrm>
+          <a:prstGeom prst="roundRect">
+            <a:avLst>
+              <a:gd name="adj" fmla="val 12000"/>
+            </a:avLst>
+          </a:prstGeom>
+          <a:solidFill>
+            <a:srgbClr val="2E3338"/>
+          </a:solidFill>
+          <a:ln>
+            <a:noFill/>
+          </a:ln>
+          <a:effectLst/>
+        </p:spPr>
+        <p:style>
+          <a:lnRef idx="1">
+            <a:schemeClr val="accent1"/>
+          </a:lnRef>
+          <a:fillRef idx="3">
+            <a:schemeClr val="accent1"/>
+          </a:fillRef>
+          <a:effectRef idx="2">
+            <a:schemeClr val="accent1"/>
+          </a:effectRef>
+          <a:fontRef idx="minor">
+            <a:schemeClr val="lt1"/>
+          </a:fontRef>
+        </p:style>
+        <p:txBody>
+          <a:bodyPr rtlCol="0" anchor="ctr" wrap="square" lIns="73152" rIns="73152"/>
+          <a:lstStyle/>
+          <a:p>
+            <a:pPr algn="ctr"/>
+            <a:r>
+              <a:rPr sz="1300" b="1">
+                <a:solidFill>
+                  <a:srgbClr val="DEE2E6"/>
+                </a:solidFill>
+              </a:rPr>
+              <a:t>GameLevel</a:t>
+            </a:r>
+          </a:p>
+        </p:txBody>
+      </p:sp>
+      <p:sp>
+        <p:nvSpPr>
+          <p:cNvPr id="11" name="Rounded Rectangle 10"/>
+          <p:cNvSpPr/>
+          <p:nvPr/>
+        </p:nvSpPr>
+        <p:spPr>
+          <a:xfrm>
+            <a:off x="3776472" y="3776472"/>
+            <a:ext cx="1591056" cy="566928"/>
+          </a:xfrm>
+          <a:prstGeom prst="roundRect">
+            <a:avLst>
+              <a:gd name="adj" fmla="val 12000"/>
+            </a:avLst>
+          </a:prstGeom>
+          <a:solidFill>
+            <a:srgbClr val="2E3338"/>
+          </a:solidFill>
+          <a:ln>
+            <a:noFill/>
+          </a:ln>
+          <a:effectLst/>
+        </p:spPr>
+        <p:style>
+          <a:lnRef idx="1">
+            <a:schemeClr val="accent1"/>
+          </a:lnRef>
+          <a:fillRef idx="3">
+            <a:schemeClr val="accent1"/>
+          </a:fillRef>
+          <a:effectRef idx="2">
+            <a:schemeClr val="accent1"/>
+          </a:effectRef>
+          <a:fontRef idx="minor">
+            <a:schemeClr val="lt1"/>
+          </a:fontRef>
+        </p:style>
+        <p:txBody>
+          <a:bodyPr rtlCol="0" anchor="ctr" wrap="square" lIns="73152" rIns="73152"/>
+          <a:lstStyle/>
+          <a:p>
+            <a:pPr algn="ctr"/>
+            <a:r>
+              <a:rPr sz="1300" b="1">
+                <a:solidFill>
+                  <a:srgbClr val="DEE2E6"/>
+                </a:solidFill>
+              </a:rPr>
+              <a:t>Tilemap</a:t>
+            </a:r>
+          </a:p>
+          <a:p>
+            <a:pPr algn="ctr"/>
+            <a:r>
+              <a:rPr sz="1100" b="0">
+                <a:solidFill>
+                  <a:srgbClr val="9AA3AB"/>
+                </a:solidFill>
+              </a:rPr>
+              <a:t>ground and toppers</a:t>
+            </a:r>
+          </a:p>
+        </p:txBody>
+      </p:sp>
+      <p:cxnSp>
+        <p:nvCxnSpPr>
+          <p:cNvPr id="12" name="Connector 11"/>
+          <p:cNvCxnSpPr/>
+          <p:nvPr/>
+        </p:nvCxnSpPr>
+        <p:spPr>
+          <a:xfrm flipH="1">
+            <a:off x="4572000" y="3596640"/>
+            <a:ext cx="1700784" cy="161544"/>
+          </a:xfrm>
+          <a:prstGeom prst="line">
+            <a:avLst/>
+          </a:prstGeom>
+          <a:ln w="25400">
+            <a:solidFill>
+              <a:srgbClr val="9AA3AB"/>
+            </a:solidFill>
+            <a:tailEnd type="triangle"/>
+          </a:ln>
+        </p:spPr>
+        <p:style>
+          <a:lnRef idx="2">
+            <a:schemeClr val="accent1"/>
+          </a:lnRef>
+          <a:fillRef idx="0">
+            <a:schemeClr val="accent1"/>
+          </a:fillRef>
+          <a:effectRef idx="1">
+            <a:schemeClr val="accent1"/>
+          </a:effectRef>
+          <a:fontRef idx="minor">
+            <a:schemeClr val="tx1"/>
+          </a:fontRef>
+        </p:style>
+      </p:cxnSp>
+      <p:sp>
+        <p:nvSpPr>
+          <p:cNvPr id="13" name="Rounded Rectangle 12"/>
+          <p:cNvSpPr/>
+          <p:nvPr/>
+        </p:nvSpPr>
+        <p:spPr>
+          <a:xfrm>
+            <a:off x="5477256" y="3776472"/>
+            <a:ext cx="1591056" cy="566928"/>
+          </a:xfrm>
+          <a:prstGeom prst="roundRect">
+            <a:avLst>
+              <a:gd name="adj" fmla="val 12000"/>
+            </a:avLst>
+          </a:prstGeom>
+          <a:solidFill>
+            <a:srgbClr val="2E3338"/>
+          </a:solidFill>
+          <a:ln>
+            <a:noFill/>
+          </a:ln>
+          <a:effectLst/>
+        </p:spPr>
+        <p:style>
+          <a:lnRef idx="1">
+            <a:schemeClr val="accent1"/>
+          </a:lnRef>
+          <a:fillRef idx="3">
+            <a:schemeClr val="accent1"/>
+          </a:fillRef>
+          <a:effectRef idx="2">
+            <a:schemeClr val="accent1"/>
+          </a:effectRef>
+          <a:fontRef idx="minor">
+            <a:schemeClr val="lt1"/>
+          </a:fontRef>
+        </p:style>
+        <p:txBody>
+          <a:bodyPr rtlCol="0" anchor="ctr" wrap="square" lIns="73152" rIns="73152"/>
+          <a:lstStyle/>
+          <a:p>
+            <a:pPr algn="ctr"/>
+            <a:r>
+              <a:rPr sz="1300" b="1">
+                <a:solidFill>
+                  <a:srgbClr val="DEE2E6"/>
+                </a:solidFill>
+              </a:rPr>
+              <a:t>Camera</a:t>
+            </a:r>
+          </a:p>
+        </p:txBody>
+      </p:sp>
+      <p:cxnSp>
+        <p:nvCxnSpPr>
+          <p:cNvPr id="14" name="Connector 13"/>
+          <p:cNvCxnSpPr/>
+          <p:nvPr/>
+        </p:nvCxnSpPr>
+        <p:spPr>
+          <a:xfrm>
+            <a:off x="6272784" y="3596640"/>
+            <a:ext cx="0" cy="161544"/>
+          </a:xfrm>
+          <a:prstGeom prst="line">
+            <a:avLst/>
+          </a:prstGeom>
+          <a:ln w="25400">
+            <a:solidFill>
+              <a:srgbClr val="9AA3AB"/>
+            </a:solidFill>
+            <a:tailEnd type="triangle"/>
+          </a:ln>
+        </p:spPr>
+        <p:style>
+          <a:lnRef idx="2">
+            <a:schemeClr val="accent1"/>
+          </a:lnRef>
+          <a:fillRef idx="0">
+            <a:schemeClr val="accent1"/>
+          </a:fillRef>
+          <a:effectRef idx="1">
+            <a:schemeClr val="accent1"/>
+          </a:effectRef>
+          <a:fontRef idx="minor">
+            <a:schemeClr val="tx1"/>
+          </a:fontRef>
+        </p:style>
+      </p:cxnSp>
+      <p:sp>
+        <p:nvSpPr>
+          <p:cNvPr id="15" name="Rounded Rectangle 14"/>
+          <p:cNvSpPr/>
+          <p:nvPr/>
+        </p:nvSpPr>
+        <p:spPr>
+          <a:xfrm>
+            <a:off x="7178040" y="3776472"/>
+            <a:ext cx="1591056" cy="566928"/>
+          </a:xfrm>
+          <a:prstGeom prst="roundRect">
+            <a:avLst>
+              <a:gd name="adj" fmla="val 12000"/>
+            </a:avLst>
+          </a:prstGeom>
+          <a:solidFill>
+            <a:srgbClr val="2E3338"/>
+          </a:solidFill>
+          <a:ln>
+            <a:noFill/>
+          </a:ln>
+          <a:effectLst/>
+        </p:spPr>
+        <p:style>
+          <a:lnRef idx="1">
+            <a:schemeClr val="accent1"/>
+          </a:lnRef>
+          <a:fillRef idx="3">
+            <a:schemeClr val="accent1"/>
+          </a:fillRef>
+          <a:effectRef idx="2">
+            <a:schemeClr val="accent1"/>
+          </a:effectRef>
+          <a:fontRef idx="minor">
+            <a:schemeClr val="lt1"/>
+          </a:fontRef>
+        </p:style>
+        <p:txBody>
+          <a:bodyPr rtlCol="0" anchor="ctr" wrap="square" lIns="73152" rIns="73152"/>
+          <a:lstStyle/>
+          <a:p>
+            <a:pPr algn="ctr"/>
+            <a:r>
+              <a:rPr sz="1300" b="1">
+                <a:solidFill>
+                  <a:srgbClr val="DEE2E6"/>
+                </a:solidFill>
+              </a:rPr>
+              <a:t>Entities</a:t>
+            </a:r>
+          </a:p>
+          <a:p>
+            <a:pPr algn="ctr"/>
+            <a:r>
+              <a:rPr sz="1100" b="0">
+                <a:solidFill>
+                  <a:srgbClr val="9AA3AB"/>
+                </a:solidFill>
+              </a:rPr>
+              <a:t>player, slimes, coins, boxes</a:t>
+            </a:r>
+          </a:p>
+        </p:txBody>
+      </p:sp>
+      <p:cxnSp>
+        <p:nvCxnSpPr>
+          <p:cNvPr id="16" name="Connector 15"/>
+          <p:cNvCxnSpPr/>
+          <p:nvPr/>
+        </p:nvCxnSpPr>
+        <p:spPr>
+          <a:xfrm>
+            <a:off x="6272784" y="3596640"/>
+            <a:ext cx="1700784" cy="161544"/>
+          </a:xfrm>
+          <a:prstGeom prst="line">
+            <a:avLst/>
+          </a:prstGeom>
+          <a:ln w="25400">
+            <a:solidFill>
+              <a:srgbClr val="9AA3AB"/>
+            </a:solidFill>
+            <a:tailEnd type="triangle"/>
+          </a:ln>
+        </p:spPr>
+        <p:style>
+          <a:lnRef idx="2">
+            <a:schemeClr val="accent1"/>
+          </a:lnRef>
+          <a:fillRef idx="0">
+            <a:schemeClr val="accent1"/>
+          </a:fillRef>
+          <a:effectRef idx="1">
+            <a:schemeClr val="accent1"/>
+          </a:effectRef>
+          <a:fontRef idx="minor">
+            <a:schemeClr val="tx1"/>
+          </a:fontRef>
+        </p:style>
+      </p:cxnSp>
+      <p:cxnSp>
+        <p:nvCxnSpPr>
+          <p:cNvPr id="17" name="Connector 16"/>
+          <p:cNvCxnSpPr/>
+          <p:nvPr/>
+        </p:nvCxnSpPr>
+        <p:spPr>
+          <a:xfrm>
+            <a:off x="5422392" y="2831592"/>
+            <a:ext cx="850392" cy="161544"/>
+          </a:xfrm>
+          <a:prstGeom prst="line">
+            <a:avLst/>
+          </a:prstGeom>
+          <a:ln w="25400">
+            <a:solidFill>
+              <a:srgbClr val="9AA3AB"/>
+            </a:solidFill>
+            <a:tailEnd type="triangle"/>
+          </a:ln>
+        </p:spPr>
+        <p:style>
+          <a:lnRef idx="2">
+            <a:schemeClr val="accent1"/>
+          </a:lnRef>
+          <a:fillRef idx="0">
+            <a:schemeClr val="accent1"/>
+          </a:fillRef>
+          <a:effectRef idx="1">
+            <a:schemeClr val="accent1"/>
+          </a:effectRef>
+          <a:fontRef idx="minor">
+            <a:schemeClr val="tx1"/>
+          </a:fontRef>
+        </p:style>
+      </p:cxnSp>
+      <p:cxnSp>
+        <p:nvCxnSpPr>
+          <p:cNvPr id="18" name="Connector 17"/>
+          <p:cNvCxnSpPr/>
+          <p:nvPr/>
+        </p:nvCxnSpPr>
+        <p:spPr>
+          <a:xfrm>
+            <a:off x="4572000" y="2066544"/>
+            <a:ext cx="850392" cy="161544"/>
+          </a:xfrm>
+          <a:prstGeom prst="line">
+            <a:avLst/>
+          </a:prstGeom>
+          <a:ln w="25400">
+            <a:solidFill>
+              <a:srgbClr val="9AA3AB"/>
+            </a:solidFill>
+            <a:tailEnd type="triangle"/>
+          </a:ln>
+        </p:spPr>
+        <p:style>
+          <a:lnRef idx="2">
+            <a:schemeClr val="accent1"/>
+          </a:lnRef>
+          <a:fillRef idx="0">
+            <a:schemeClr val="accent1"/>
+          </a:fillRef>
+          <a:effectRef idx="1">
+            <a:schemeClr val="accent1"/>
+          </a:effectRef>
+          <a:fontRef idx="minor">
+            <a:schemeClr val="tx1"/>
+          </a:fontRef>
+        </p:style>
+      </p:cxnSp>
+      <p:sp>
+        <p:nvSpPr>
+          <p:cNvPr id="19" name="TextBox 18"/>
+          <p:cNvSpPr txBox="1"/>
+          <p:nvPr/>
+        </p:nvSpPr>
+        <p:spPr>
+          <a:xfrm>
+            <a:off x="457200" y="4462272"/>
+            <a:ext cx="8229600" cy="365760"/>
+          </a:xfrm>
+          <a:prstGeom prst="rect">
+            <a:avLst/>
+          </a:prstGeom>
+          <a:noFill/>
+        </p:spPr>
+        <p:txBody>
+          <a:bodyPr wrap="square">
+            <a:spAutoFit/>
+          </a:bodyPr>
+          <a:lstStyle/>
+          <a:p>
+            <a:pPr algn="ctr"/>
+            <a:r>
+              <a:rPr sz="1300" b="0" i="0">
+                <a:solidFill>
+                  <a:srgbClr val="9AA3AB"/>
+                </a:solidFill>
+              </a:rPr>
+              <a:t>Three kinds of state in one game: the game’s, the player’s and each slime’s.</a:t>
+            </a:r>
+          </a:p>
+        </p:txBody>
+      </p:sp>
+    </p:spTree>
+  </p:cSld>
+  <p:clrMapOvr>
+    <a:masterClrMapping/>
+  </p:clrMapOvr>
+</p:sld>
+</file>
+
+<file path=ppt/slides/slide43.xml><?xml version="1.0" encoding="utf-8"?>
+<p:sld xmlns:a="http://schemas.openxmlformats.org/drawingml/2006/main" xmlns:p="http://schemas.openxmlformats.org/presentationml/2006/main" xmlns:r="http://schemas.openxmlformats.org/officeDocument/2006/relationships">
+  <p:cSld>
+    <p:spTree>
+      <p:nvGrpSpPr>
+        <p:cNvPr id="1" name=""/>
+        <p:cNvGrpSpPr/>
+        <p:nvPr/>
+      </p:nvGrpSpPr>
+      <p:grpSpPr/>
+      <p:sp>
+        <p:nvSpPr>
+          <p:cNvPr id="2" name="Title 1"/>
+          <p:cNvSpPr>
+            <a:spLocks noGrp="1"/>
+          </p:cNvSpPr>
+          <p:nvPr>
+            <p:ph type="title"/>
+          </p:nvPr>
+        </p:nvSpPr>
+        <p:spPr/>
+        <p:txBody>
+          <a:bodyPr/>
+          <a:lstStyle/>
+          <a:p>
+            <a:pPr indent="0" lvl="0" marL="0" rtl="0" algn="l">
+              <a:spcBef>
+                <a:spcPts val="0"/>
+              </a:spcBef>
+              <a:spcAft>
+                <a:spcPts val="0"/>
+              </a:spcAft>
+              <a:buNone/>
+            </a:pPr>
+            <a:r>
+              <a:rPr lang="en"/>
+              <a:t>Summary</a:t>
+            </a:r>
+            <a:endParaRPr/>
+          </a:p>
+        </p:txBody>
+      </p:sp>
+      <p:sp>
+        <p:nvSpPr>
+          <p:cNvPr id="3" name="Text Placeholder 2"/>
+          <p:cNvSpPr>
+            <a:spLocks noGrp="1"/>
+          </p:cNvSpPr>
+          <p:nvPr>
+            <p:ph type="body" idx="1"/>
+          </p:nvPr>
+        </p:nvSpPr>
+        <p:spPr>
+          <a:xfrm>
+            <a:off x="311700" y="885950"/>
+            <a:ext cx="8520600" cy="521208"/>
+          </a:xfrm>
+        </p:spPr>
+        <p:txBody>
+          <a:bodyPr/>
+          <a:lstStyle/>
+          <a:p>
+            <a:pPr indent="-330200" lvl="0" marL="457200" rtl="0" algn="l">
+              <a:spcBef>
+                <a:spcPts val="0"/>
+              </a:spcBef>
+              <a:spcAft>
+                <a:spcPts val="0"/>
+              </a:spcAft>
+              <a:buSzPts val="1600"/>
+              <a:buChar char="●"/>
+            </a:pPr>
+            <a:r>
+              <a:rPr lang="en" b="1"/>
+              <a:t>Seven concerns, and this session’s answer to each.</a:t>
+            </a:r>
+            <a:endParaRPr/>
+          </a:p>
+        </p:txBody>
+      </p:sp>
+      <p:sp>
+        <p:nvSpPr>
+          <p:cNvPr id="4" name="Rounded Rectangle 3"/>
+          <p:cNvSpPr/>
+          <p:nvPr/>
+        </p:nvSpPr>
+        <p:spPr>
+          <a:xfrm>
+            <a:off x="548640" y="1417320"/>
+            <a:ext cx="2560320" cy="841248"/>
+          </a:xfrm>
+          <a:prstGeom prst="roundRect">
+            <a:avLst>
+              <a:gd name="adj" fmla="val 12000"/>
+            </a:avLst>
+          </a:prstGeom>
+          <a:solidFill>
+            <a:srgbClr val="2E3338"/>
+          </a:solidFill>
+          <a:ln>
+            <a:noFill/>
+          </a:ln>
+          <a:effectLst/>
+        </p:spPr>
+        <p:style>
+          <a:lnRef idx="1">
+            <a:schemeClr val="accent1"/>
+          </a:lnRef>
+          <a:fillRef idx="3">
+            <a:schemeClr val="accent1"/>
+          </a:fillRef>
+          <a:effectRef idx="2">
+            <a:schemeClr val="accent1"/>
+          </a:effectRef>
+          <a:fontRef idx="minor">
+            <a:schemeClr val="lt1"/>
+          </a:fontRef>
+        </p:style>
+        <p:txBody>
+          <a:bodyPr rtlCol="0" anchor="ctr" wrap="square" lIns="73152" rIns="73152"/>
+          <a:lstStyle/>
+          <a:p>
+            <a:pPr algn="ctr"/>
+            <a:r>
+              <a:rPr sz="1500" b="1">
+                <a:solidFill>
+                  <a:srgbClr val="DEE2E6"/>
+                </a:solidFill>
+              </a:rPr>
+              <a:t>What the level is made of</a:t>
+            </a:r>
+          </a:p>
+          <a:p>
+            <a:pPr algn="ctr"/>
+            <a:r>
+              <a:rPr sz="1300" b="0">
+                <a:solidFill>
+                  <a:srgbClr val="9AA3AB"/>
+                </a:solidFill>
+              </a:rPr>
+              <a:t>Tilemaps, built by level makers</a:t>
+            </a:r>
+          </a:p>
+        </p:txBody>
+      </p:sp>
+      <p:sp>
+        <p:nvSpPr>
+          <p:cNvPr id="5" name="Rounded Rectangle 4"/>
+          <p:cNvSpPr/>
+          <p:nvPr/>
+        </p:nvSpPr>
+        <p:spPr>
+          <a:xfrm>
+            <a:off x="3291840" y="1417320"/>
+            <a:ext cx="2560320" cy="841248"/>
+          </a:xfrm>
+          <a:prstGeom prst="roundRect">
+            <a:avLst>
+              <a:gd name="adj" fmla="val 12000"/>
+            </a:avLst>
+          </a:prstGeom>
+          <a:solidFill>
+            <a:srgbClr val="2E3338"/>
+          </a:solidFill>
+          <a:ln>
+            <a:noFill/>
+          </a:ln>
+          <a:effectLst/>
+        </p:spPr>
+        <p:style>
+          <a:lnRef idx="1">
+            <a:schemeClr val="accent1"/>
+          </a:lnRef>
+          <a:fillRef idx="3">
+            <a:schemeClr val="accent1"/>
+          </a:fillRef>
+          <a:effectRef idx="2">
+            <a:schemeClr val="accent1"/>
+          </a:effectRef>
+          <a:fontRef idx="minor">
+            <a:schemeClr val="lt1"/>
+          </a:fontRef>
+        </p:style>
+        <p:txBody>
+          <a:bodyPr rtlCol="0" anchor="ctr" wrap="square" lIns="73152" rIns="73152"/>
+          <a:lstStyle/>
+          <a:p>
+            <a:pPr algn="ctr"/>
+            <a:r>
+              <a:rPr sz="1500" b="1">
+                <a:solidFill>
+                  <a:srgbClr val="DEE2E6"/>
+                </a:solidFill>
+              </a:rPr>
+              <a:t>Things that move</a:t>
+            </a:r>
+          </a:p>
+          <a:p>
+            <a:pPr algn="ctr"/>
+            <a:r>
+              <a:rPr sz="1300" b="0">
+                <a:solidFill>
+                  <a:srgbClr val="9AA3AB"/>
+                </a:solidFill>
+              </a:rPr>
+              <a:t>Entities, in a list</a:t>
+            </a:r>
+          </a:p>
+        </p:txBody>
+      </p:sp>
+      <p:sp>
+        <p:nvSpPr>
+          <p:cNvPr id="6" name="Rounded Rectangle 5"/>
+          <p:cNvSpPr/>
+          <p:nvPr/>
+        </p:nvSpPr>
+        <p:spPr>
+          <a:xfrm>
+            <a:off x="6035040" y="1417320"/>
+            <a:ext cx="2560320" cy="841248"/>
+          </a:xfrm>
+          <a:prstGeom prst="roundRect">
+            <a:avLst>
+              <a:gd name="adj" fmla="val 12000"/>
+            </a:avLst>
+          </a:prstGeom>
+          <a:solidFill>
+            <a:srgbClr val="2E3338"/>
+          </a:solidFill>
+          <a:ln>
+            <a:noFill/>
+          </a:ln>
+          <a:effectLst/>
+        </p:spPr>
+        <p:style>
+          <a:lnRef idx="1">
+            <a:schemeClr val="accent1"/>
+          </a:lnRef>
+          <a:fillRef idx="3">
+            <a:schemeClr val="accent1"/>
+          </a:fillRef>
+          <a:effectRef idx="2">
+            <a:schemeClr val="accent1"/>
+          </a:effectRef>
+          <a:fontRef idx="minor">
+            <a:schemeClr val="lt1"/>
+          </a:fontRef>
+        </p:style>
+        <p:txBody>
+          <a:bodyPr rtlCol="0" anchor="ctr" wrap="square" lIns="73152" rIns="73152"/>
+          <a:lstStyle/>
+          <a:p>
+            <a:pPr algn="ctr"/>
+            <a:r>
+              <a:rPr sz="1500" b="1">
+                <a:solidFill>
+                  <a:srgbClr val="DEE2E6"/>
+                </a:solidFill>
+              </a:rPr>
+              <a:t>Whether a spot is solid</a:t>
+            </a:r>
+          </a:p>
+          <a:p>
+            <a:pPr algn="ctr"/>
+            <a:r>
+              <a:rPr sz="1300" b="0">
+                <a:solidFill>
+                  <a:srgbClr val="9AA3AB"/>
+                </a:solidFill>
+              </a:rPr>
+              <a:t>One lookup in the grid, O(1)</a:t>
+            </a:r>
+          </a:p>
+        </p:txBody>
+      </p:sp>
+      <p:sp>
+        <p:nvSpPr>
+          <p:cNvPr id="7" name="Rounded Rectangle 6"/>
+          <p:cNvSpPr/>
+          <p:nvPr/>
+        </p:nvSpPr>
+        <p:spPr>
+          <a:xfrm>
+            <a:off x="548640" y="2395728"/>
+            <a:ext cx="2560320" cy="841248"/>
+          </a:xfrm>
+          <a:prstGeom prst="roundRect">
+            <a:avLst>
+              <a:gd name="adj" fmla="val 12000"/>
+            </a:avLst>
+          </a:prstGeom>
+          <a:solidFill>
+            <a:srgbClr val="2E3338"/>
+          </a:solidFill>
+          <a:ln>
+            <a:noFill/>
+          </a:ln>
+          <a:effectLst/>
+        </p:spPr>
+        <p:style>
+          <a:lnRef idx="1">
+            <a:schemeClr val="accent1"/>
+          </a:lnRef>
+          <a:fillRef idx="3">
+            <a:schemeClr val="accent1"/>
+          </a:fillRef>
+          <a:effectRef idx="2">
+            <a:schemeClr val="accent1"/>
+          </a:effectRef>
+          <a:fontRef idx="minor">
+            <a:schemeClr val="lt1"/>
+          </a:fontRef>
+        </p:style>
+        <p:txBody>
+          <a:bodyPr rtlCol="0" anchor="ctr" wrap="square" lIns="73152" rIns="73152"/>
+          <a:lstStyle/>
+          <a:p>
+            <a:pPr algn="ctr"/>
+            <a:r>
+              <a:rPr sz="1500" b="1">
+                <a:solidFill>
+                  <a:srgbClr val="DEE2E6"/>
+                </a:solidFill>
+              </a:rPr>
+              <a:t>Stopping at a wall</a:t>
+            </a:r>
+          </a:p>
+          <a:p>
+            <a:pPr algn="ctr"/>
+            <a:r>
+              <a:rPr sz="1300" b="0">
+                <a:solidFill>
+                  <a:srgbClr val="9AA3AB"/>
+                </a:solidFill>
+              </a:rPr>
+              <a:t>Move, then snap, an axis at a time</a:t>
+            </a:r>
+          </a:p>
+        </p:txBody>
+      </p:sp>
+      <p:sp>
+        <p:nvSpPr>
+          <p:cNvPr id="8" name="Rounded Rectangle 7"/>
+          <p:cNvSpPr/>
+          <p:nvPr/>
+        </p:nvSpPr>
+        <p:spPr>
+          <a:xfrm>
+            <a:off x="3291840" y="2395728"/>
+            <a:ext cx="2560320" cy="841248"/>
+          </a:xfrm>
+          <a:prstGeom prst="roundRect">
+            <a:avLst>
+              <a:gd name="adj" fmla="val 12000"/>
+            </a:avLst>
+          </a:prstGeom>
+          <a:solidFill>
+            <a:srgbClr val="2E3338"/>
+          </a:solidFill>
+          <a:ln>
+            <a:noFill/>
+          </a:ln>
+          <a:effectLst/>
+        </p:spPr>
+        <p:style>
+          <a:lnRef idx="1">
+            <a:schemeClr val="accent1"/>
+          </a:lnRef>
+          <a:fillRef idx="3">
+            <a:schemeClr val="accent1"/>
+          </a:fillRef>
+          <a:effectRef idx="2">
+            <a:schemeClr val="accent1"/>
+          </a:effectRef>
+          <a:fontRef idx="minor">
+            <a:schemeClr val="lt1"/>
+          </a:fontRef>
+        </p:style>
+        <p:txBody>
+          <a:bodyPr rtlCol="0" anchor="ctr" wrap="square" lIns="73152" rIns="73152"/>
+          <a:lstStyle/>
+          <a:p>
+            <a:pPr algn="ctr"/>
+            <a:r>
+              <a:rPr sz="1500" b="1">
+                <a:solidFill>
+                  <a:srgbClr val="DEE2E6"/>
+                </a:solidFill>
+              </a:rPr>
+              <a:t>What the player is doing</a:t>
+            </a:r>
+          </a:p>
+          <a:p>
+            <a:pPr algn="ctr"/>
+            <a:r>
+              <a:rPr sz="1300" b="0">
+                <a:solidFill>
+                  <a:srgbClr val="9AA3AB"/>
+                </a:solidFill>
+              </a:rPr>
+              <a:t>States sharing a base state</a:t>
+            </a:r>
+          </a:p>
+        </p:txBody>
+      </p:sp>
+      <p:sp>
+        <p:nvSpPr>
+          <p:cNvPr id="9" name="Rounded Rectangle 8"/>
+          <p:cNvSpPr/>
+          <p:nvPr/>
+        </p:nvSpPr>
+        <p:spPr>
+          <a:xfrm>
+            <a:off x="6035040" y="2395728"/>
+            <a:ext cx="2560320" cy="841248"/>
+          </a:xfrm>
+          <a:prstGeom prst="roundRect">
+            <a:avLst>
+              <a:gd name="adj" fmla="val 12000"/>
+            </a:avLst>
+          </a:prstGeom>
+          <a:solidFill>
+            <a:srgbClr val="2E3338"/>
+          </a:solidFill>
+          <a:ln>
+            <a:noFill/>
+          </a:ln>
+          <a:effectLst/>
+        </p:spPr>
+        <p:style>
+          <a:lnRef idx="1">
+            <a:schemeClr val="accent1"/>
+          </a:lnRef>
+          <a:fillRef idx="3">
+            <a:schemeClr val="accent1"/>
+          </a:fillRef>
+          <a:effectRef idx="2">
+            <a:schemeClr val="accent1"/>
+          </a:effectRef>
+          <a:fontRef idx="minor">
+            <a:schemeClr val="lt1"/>
+          </a:fontRef>
+        </p:style>
+        <p:txBody>
+          <a:bodyPr rtlCol="0" anchor="ctr" wrap="square" lIns="73152" rIns="73152"/>
+          <a:lstStyle/>
+          <a:p>
+            <a:pPr algn="ctr"/>
+            <a:r>
+              <a:rPr sz="1500" b="1">
+                <a:solidFill>
+                  <a:srgbClr val="DEE2E6"/>
+                </a:solidFill>
+              </a:rPr>
+              <a:t>A level wider than the screen</a:t>
+            </a:r>
+          </a:p>
+          <a:p>
+            <a:pPr algn="ctr"/>
+            <a:r>
+              <a:rPr sz="1300" b="0">
+                <a:solidFill>
+                  <a:srgbClr val="9AA3AB"/>
+                </a:solidFill>
+              </a:rPr>
+              <a:t>A camera transform</a:t>
+            </a:r>
+          </a:p>
+        </p:txBody>
+      </p:sp>
+      <p:sp>
+        <p:nvSpPr>
+          <p:cNvPr id="10" name="Rounded Rectangle 9"/>
+          <p:cNvSpPr/>
+          <p:nvPr/>
+        </p:nvSpPr>
+        <p:spPr>
+          <a:xfrm>
+            <a:off x="3291840" y="3374136"/>
+            <a:ext cx="2560320" cy="841248"/>
+          </a:xfrm>
+          <a:prstGeom prst="roundRect">
+            <a:avLst>
+              <a:gd name="adj" fmla="val 12000"/>
+            </a:avLst>
+          </a:prstGeom>
+          <a:solidFill>
+            <a:srgbClr val="2E3338"/>
+          </a:solidFill>
+          <a:ln>
+            <a:noFill/>
+          </a:ln>
+          <a:effectLst/>
+        </p:spPr>
+        <p:style>
+          <a:lnRef idx="1">
+            <a:schemeClr val="accent1"/>
+          </a:lnRef>
+          <a:fillRef idx="3">
+            <a:schemeClr val="accent1"/>
+          </a:fillRef>
+          <a:effectRef idx="2">
+            <a:schemeClr val="accent1"/>
+          </a:effectRef>
+          <a:fontRef idx="minor">
+            <a:schemeClr val="lt1"/>
+          </a:fontRef>
+        </p:style>
+        <p:txBody>
+          <a:bodyPr rtlCol="0" anchor="ctr" wrap="square" lIns="73152" rIns="73152"/>
+          <a:lstStyle/>
+          <a:p>
+            <a:pPr algn="ctr"/>
+            <a:r>
+              <a:rPr sz="1500" b="1">
+                <a:solidFill>
+                  <a:srgbClr val="DEE2E6"/>
+                </a:solidFill>
+              </a:rPr>
+              <a:t>Seeing the collision code</a:t>
+            </a:r>
+          </a:p>
+          <a:p>
+            <a:pPr algn="ctr"/>
+            <a:r>
+              <a:rPr sz="1300" b="0">
+                <a:solidFill>
+                  <a:srgbClr val="9AA3AB"/>
+                </a:solidFill>
+              </a:rPr>
+              <a:t>Debug drawing</a:t>
+            </a:r>
+          </a:p>
+        </p:txBody>
+      </p:sp>
+    </p:spTree>
+  </p:cSld>
+  <p:clrMapOvr>
+    <a:masterClrMapping/>
+  </p:clrMapOvr>
+</p:sld>
+</file>
+
+<file path=ppt/slides/slide44.xml><?xml version="1.0" encoding="utf-8"?>
 <p:sld xmlns:a="http://schemas.openxmlformats.org/drawingml/2006/main" xmlns:r="http://schemas.openxmlformats.org/officeDocument/2006/relationships" xmlns:mc="http://schemas.openxmlformats.org/markup-compatibility/2006" xmlns:mv="urn:schemas-microsoft-com:mac:vml" xmlns:p="http://schemas.openxmlformats.org/presentationml/2006/main" xmlns:c="http://schemas.openxmlformats.org/drawingml/2006/chart" xmlns:dgm="http://schemas.openxmlformats.org/drawingml/2006/diagram" xmlns:o="urn:schemas-microsoft-com:office:office" xmlns:v="urn:schemas-microsoft-com:vml" xmlns:pvml="urn:schemas-microsoft-com:office:powerpoint" xmlns:com="http://schemas.openxmlformats.org/drawingml/2006/compatibility" xmlns:p14="http://schemas.microsoft.com/office/powerpoint/2010/main" xmlns:p15="http://schemas.microsoft.com/office/powerpoint/2012/main" xmlns:ahyp="http://schemas.microsoft.com/office/drawing/2018/hyperlinkcolor">
   <p:cSld>
     <p:spTree>
@@ -28635,7 +30030,7 @@
 </p:sld>
 </file>
 
-<file path=ppt/slides/slide43.xml><?xml version="1.0" encoding="utf-8"?>
+<file path=ppt/slides/slide45.xml><?xml version="1.0" encoding="utf-8"?>
 <p:sld xmlns:a="http://schemas.openxmlformats.org/drawingml/2006/main" xmlns:r="http://schemas.openxmlformats.org/officeDocument/2006/relationships" xmlns:mc="http://schemas.openxmlformats.org/markup-compatibility/2006" xmlns:mv="urn:schemas-microsoft-com:mac:vml" xmlns:p="http://schemas.openxmlformats.org/presentationml/2006/main" xmlns:c="http://schemas.openxmlformats.org/drawingml/2006/chart" xmlns:dgm="http://schemas.openxmlformats.org/drawingml/2006/diagram" xmlns:o="urn:schemas-microsoft-com:office:office" xmlns:v="urn:schemas-microsoft-com:vml" xmlns:pvml="urn:schemas-microsoft-com:office:powerpoint" xmlns:com="http://schemas.openxmlformats.org/drawingml/2006/compatibility" xmlns:p14="http://schemas.microsoft.com/office/powerpoint/2010/main" xmlns:p15="http://schemas.microsoft.com/office/powerpoint/2012/main" xmlns:ahyp="http://schemas.microsoft.com/office/drawing/2018/hyperlinkcolor">
   <p:cSld>
     <p:spTree>
@@ -29051,7 +30446,7 @@
 </p:sld>
 </file>
 
-<file path=ppt/slides/slide44.xml><?xml version="1.0" encoding="utf-8"?>
+<file path=ppt/slides/slide46.xml><?xml version="1.0" encoding="utf-8"?>
 <p:sld xmlns:a="http://schemas.openxmlformats.org/drawingml/2006/main" xmlns:p="http://schemas.openxmlformats.org/presentationml/2006/main" xmlns:r="http://schemas.openxmlformats.org/officeDocument/2006/relationships">
   <p:cSld>
     <p:spTree>
@@ -29177,312 +30572,6 @@
             <a:r>
               <a:rPr lang="en"/>
               <a:t>Use it to find where coyote time starts and ends</a:t>
-            </a:r>
-            <a:endParaRPr/>
-          </a:p>
-        </p:txBody>
-      </p:sp>
-    </p:spTree>
-  </p:cSld>
-  <p:clrMapOvr>
-    <a:masterClrMapping/>
-  </p:clrMapOvr>
-</p:sld>
-</file>
-
-<file path=ppt/slides/slide45.xml><?xml version="1.0" encoding="utf-8"?>
-<p:sld xmlns:a="http://schemas.openxmlformats.org/drawingml/2006/main" xmlns:p="http://schemas.openxmlformats.org/presentationml/2006/main" xmlns:r="http://schemas.openxmlformats.org/officeDocument/2006/relationships">
-  <p:cSld>
-    <p:spTree>
-      <p:nvGrpSpPr>
-        <p:cNvPr id="1" name=""/>
-        <p:cNvGrpSpPr/>
-        <p:nvPr/>
-      </p:nvGrpSpPr>
-      <p:grpSpPr/>
-      <p:sp>
-        <p:nvSpPr>
-          <p:cNvPr id="2" name="Title 1"/>
-          <p:cNvSpPr>
-            <a:spLocks noGrp="1"/>
-          </p:cNvSpPr>
-          <p:nvPr>
-            <p:ph type="title"/>
-          </p:nvPr>
-        </p:nvSpPr>
-        <p:spPr/>
-        <p:txBody>
-          <a:bodyPr/>
-          <a:lstStyle/>
-          <a:p>
-            <a:pPr indent="0" lvl="0" marL="0" rtl="0" algn="l">
-              <a:spcBef>
-                <a:spcPts val="0"/>
-              </a:spcBef>
-              <a:spcAft>
-                <a:spcPts val="0"/>
-              </a:spcAft>
-              <a:buNone/>
-            </a:pPr>
-            <a:r>
-              <a:rPr lang="en"/>
-              <a:t>Check Yourself</a:t>
-            </a:r>
-            <a:endParaRPr/>
-          </a:p>
-        </p:txBody>
-      </p:sp>
-      <p:sp>
-        <p:nvSpPr>
-          <p:cNvPr id="3" name="Text Placeholder 2"/>
-          <p:cNvSpPr>
-            <a:spLocks noGrp="1"/>
-          </p:cNvSpPr>
-          <p:nvPr>
-            <p:ph type="body" idx="1"/>
-          </p:nvPr>
-        </p:nvSpPr>
-        <p:spPr>
-          <a:xfrm>
-            <a:off x="311700" y="885950"/>
-            <a:ext cx="8520600" cy="1335024"/>
-          </a:xfrm>
-        </p:spPr>
-        <p:txBody>
-          <a:bodyPr/>
-          <a:lstStyle/>
-          <a:p>
-            <a:pPr indent="-330200" lvl="0" marL="457200" rtl="0" algn="l">
-              <a:spcBef>
-                <a:spcPts val="0"/>
-              </a:spcBef>
-              <a:spcAft>
-                <a:spcPts val="0"/>
-              </a:spcAft>
-              <a:buSzPts val="1600"/>
-              <a:buChar char="●"/>
-            </a:pPr>
-            <a:r>
-              <a:rPr lang="en"/>
-              <a:t>What do the player’s states share, and where does that code live?</a:t>
-            </a:r>
-            <a:endParaRPr/>
-          </a:p>
-          <a:p>
-            <a:pPr indent="-330200" lvl="0" marL="457200" rtl="0" algn="l">
-              <a:spcBef>
-                <a:spcPts val="0"/>
-              </a:spcBef>
-              <a:spcAft>
-                <a:spcPts val="0"/>
-              </a:spcAft>
-              <a:buSzPts val="1600"/>
-              <a:buChar char="●"/>
-            </a:pPr>
-            <a:r>
-              <a:rPr lang="en"/>
-              <a:t>Why can tile collision be O(1) while entity collision can’t?</a:t>
-            </a:r>
-            <a:endParaRPr/>
-          </a:p>
-          <a:p>
-            <a:pPr indent="-330200" lvl="0" marL="457200" rtl="0" algn="l">
-              <a:spcBef>
-                <a:spcPts val="0"/>
-              </a:spcBef>
-              <a:spcAft>
-                <a:spcPts val="0"/>
-              </a:spcAft>
-              <a:buSzPts val="1600"/>
-              <a:buChar char="●"/>
-            </a:pPr>
-            <a:r>
-              <a:rPr lang="en"/>
-              <a:t>Why keep debug drawing in the code, behind a switch, instead of deleting it?</a:t>
-            </a:r>
-            <a:endParaRPr/>
-          </a:p>
-        </p:txBody>
-      </p:sp>
-      <p:sp>
-        <p:nvSpPr>
-          <p:cNvPr id="4" name="TextBox 3"/>
-          <p:cNvSpPr txBox="1"/>
-          <p:nvPr/>
-        </p:nvSpPr>
-        <p:spPr>
-          <a:xfrm>
-            <a:off x="457200" y="2798064"/>
-            <a:ext cx="8229600" cy="457200"/>
-          </a:xfrm>
-          <a:prstGeom prst="rect">
-            <a:avLst/>
-          </a:prstGeom>
-          <a:noFill/>
-        </p:spPr>
-        <p:txBody>
-          <a:bodyPr wrap="square">
-            <a:spAutoFit/>
-          </a:bodyPr>
-          <a:lstStyle/>
-          <a:p>
-            <a:pPr algn="ctr"/>
-            <a:r>
-              <a:rPr sz="1400" b="0" i="0">
-                <a:solidFill>
-                  <a:srgbClr val="9AA3AB"/>
-                </a:solidFill>
-              </a:rPr>
-              <a:t>The answers, and more questions, are on the course site.</a:t>
-            </a:r>
-          </a:p>
-        </p:txBody>
-      </p:sp>
-    </p:spTree>
-  </p:cSld>
-  <p:clrMapOvr>
-    <a:masterClrMapping/>
-  </p:clrMapOvr>
-</p:sld>
-</file>
-
-<file path=ppt/slides/slide46.xml><?xml version="1.0" encoding="utf-8"?>
-<p:sld xmlns:a="http://schemas.openxmlformats.org/drawingml/2006/main" xmlns:p="http://schemas.openxmlformats.org/presentationml/2006/main" xmlns:r="http://schemas.openxmlformats.org/officeDocument/2006/relationships">
-  <p:cSld>
-    <p:spTree>
-      <p:nvGrpSpPr>
-        <p:cNvPr id="1" name=""/>
-        <p:cNvGrpSpPr/>
-        <p:nvPr/>
-      </p:nvGrpSpPr>
-      <p:grpSpPr/>
-      <p:sp>
-        <p:nvSpPr>
-          <p:cNvPr id="57" name="Google Shape;57;p12"/>
-          <p:cNvSpPr txBox="1"/>
-          <p:nvPr>
-            <p:ph type="title"/>
-          </p:nvPr>
-        </p:nvSpPr>
-        <p:spPr>
-          <a:xfrm>
-            <a:off x="311700" y="195615"/>
-            <a:ext cx="8520600" cy="572700"/>
-          </a:xfrm>
-          <a:prstGeom prst="rect">
-            <a:avLst/>
-          </a:prstGeom>
-        </p:spPr>
-        <p:txBody>
-          <a:bodyPr anchorCtr="0" anchor="t" bIns="91425" lIns="91425" spcFirstLastPara="1" rIns="91425" wrap="square" tIns="91425">
-            <a:normAutofit fontScale="90000"/>
-          </a:bodyPr>
-          <a:lstStyle/>
-          <a:p>
-            <a:pPr indent="0" lvl="0" marL="0" rtl="0" algn="l">
-              <a:spcBef>
-                <a:spcPts val="0"/>
-              </a:spcBef>
-              <a:spcAft>
-                <a:spcPts val="0"/>
-              </a:spcAft>
-              <a:buNone/>
-            </a:pPr>
-            <a:r>
-              <a:rPr lang="en"/>
-              <a:t>Apply It to Your Project</a:t>
-            </a:r>
-            <a:endParaRPr/>
-          </a:p>
-        </p:txBody>
-      </p:sp>
-      <p:sp>
-        <p:nvSpPr>
-          <p:cNvPr id="58" name="Google Shape;58;p12"/>
-          <p:cNvSpPr txBox="1"/>
-          <p:nvPr>
-            <p:ph idx="1" type="body"/>
-          </p:nvPr>
-        </p:nvSpPr>
-        <p:spPr>
-          <a:xfrm>
-            <a:off x="311700" y="885950"/>
-            <a:ext cx="8520600" cy="4023300"/>
-          </a:xfrm>
-          <a:prstGeom prst="rect">
-            <a:avLst/>
-          </a:prstGeom>
-        </p:spPr>
-        <p:txBody>
-          <a:bodyPr anchorCtr="0" anchor="t" bIns="91425" lIns="91425" spcFirstLastPara="1" rIns="91425" wrap="square" tIns="91425">
-            <a:normAutofit/>
-          </a:bodyPr>
-          <a:lstStyle/>
-          <a:p>
-            <a:pPr indent="-330200" lvl="0" marL="457200" rtl="0" algn="l">
-              <a:spcBef>
-                <a:spcPts val="0"/>
-              </a:spcBef>
-              <a:spcAft>
-                <a:spcPts val="0"/>
-              </a:spcAft>
-              <a:buSzPts val="1600"/>
-              <a:buChar char="●"/>
-            </a:pPr>
-            <a:r>
-              <a:rPr lang="en"/>
-              <a:t>What would you want to see while debugging your game?</a:t>
-            </a:r>
-            <a:endParaRPr/>
-          </a:p>
-          <a:p>
-            <a:pPr indent="-317500" lvl="1" marL="914400" rtl="0" algn="l">
-              <a:spcBef>
-                <a:spcPts val="0"/>
-              </a:spcBef>
-              <a:spcAft>
-                <a:spcPts val="0"/>
-              </a:spcAft>
-              <a:buSzPts val="1400"/>
-              <a:buChar char="○"/>
-            </a:pPr>
-            <a:r>
-              <a:rPr lang="en"/>
-              <a:t>Add debug drawing for hitboxes, triggers or AI targets, behind a key</a:t>
-            </a:r>
-            <a:endParaRPr/>
-          </a:p>
-          <a:p>
-            <a:pPr indent="-330200" lvl="0" marL="457200" rtl="0" algn="l">
-              <a:spcBef>
-                <a:spcPts val="0"/>
-              </a:spcBef>
-              <a:spcAft>
-                <a:spcPts val="0"/>
-              </a:spcAft>
-              <a:buSzPts val="1600"/>
-              <a:buChar char="●"/>
-            </a:pPr>
-            <a:r>
-              <a:rPr lang="en"/>
-              <a:t>Which entities have distinct behaviour modes? Draw a state diagram for one</a:t>
-            </a:r>
-            <a:endParaRPr/>
-          </a:p>
-          <a:p>
-            <a:pPr indent="-330200" lvl="0" marL="457200" rtl="0" algn="l">
-              <a:spcBef>
-                <a:spcPts val="0"/>
-              </a:spcBef>
-              <a:spcAft>
-                <a:spcPts val="0"/>
-              </a:spcAft>
-              <a:buSzPts val="1600"/>
-              <a:buChar char="●"/>
-            </a:pPr>
-            <a:r>
-              <a:rPr lang="en"/>
-              <a:t>Is anything a set of booleans that should be a state machine?</a:t>
             </a:r>
             <a:endParaRPr/>
           </a:p>
@@ -29532,7 +30621,7 @@
             </a:pPr>
             <a:r>
               <a:rPr lang="en"/>
-              <a:t>The Whole Game</a:t>
+              <a:t>Check Yourself</a:t>
             </a:r>
             <a:endParaRPr/>
           </a:p>
@@ -29551,7 +30640,7 @@
         <p:spPr>
           <a:xfrm>
             <a:off x="311700" y="885950"/>
-            <a:ext cx="8520600" cy="521208"/>
+            <a:ext cx="8520600" cy="1335024"/>
           </a:xfrm>
         </p:spPr>
         <p:txBody>
@@ -29569,8 +30658,42 @@
               <a:buChar char="●"/>
             </a:pPr>
             <a:r>
-              <a:rPr lang="en" b="1"/>
-              <a:t>Mario8 adds music and sounds. A level maker builds the level the play state holds.</a:t>
+              <a:rPr lang="en"/>
+              <a:t>What do the player’s states share, and where does that code live?</a:t>
+            </a:r>
+            <a:endParaRPr/>
+          </a:p>
+          <a:p>
+            <a:pPr indent="-330200" lvl="0" marL="457200" rtl="0" algn="l">
+              <a:spcBef>
+                <a:spcPts val="0"/>
+              </a:spcBef>
+              <a:spcAft>
+                <a:spcPts val="0"/>
+              </a:spcAft>
+              <a:buSzPts val="1600"/>
+              <a:buChar char="●"/>
+            </a:pPr>
+            <a:r>
+              <a:rPr lang="en"/>
+              <a:t>Why can tile collision be O(1) while entity collision can’t?</a:t>
+            </a:r>
+            <a:endParaRPr/>
+          </a:p>
+          <a:p>
+            <a:pPr indent="-330200" lvl="0" marL="457200" rtl="0" algn="l">
+              <a:spcBef>
+                <a:spcPts val="0"/>
+              </a:spcBef>
+              <a:spcAft>
+                <a:spcPts val="0"/>
+              </a:spcAft>
+              <a:buSzPts val="1600"/>
+              <a:buChar char="●"/>
+            </a:pPr>
+            <a:r>
+              <a:rPr lang="en"/>
+              <a:t>Why keep debug drawing in the code, behind a switch, instead of deleting it?</a:t>
             </a:r>
             <a:endParaRPr/>
           </a:p>
@@ -29578,744 +30701,14 @@
       </p:sp>
       <p:sp>
         <p:nvSpPr>
-          <p:cNvPr id="4" name="Rounded Rectangle 3"/>
-          <p:cNvSpPr/>
-          <p:nvPr/>
-        </p:nvSpPr>
-        <p:spPr>
-          <a:xfrm>
-            <a:off x="3429000" y="1481328"/>
-            <a:ext cx="2286000" cy="566928"/>
-          </a:xfrm>
-          <a:prstGeom prst="roundRect">
-            <a:avLst>
-              <a:gd name="adj" fmla="val 12000"/>
-            </a:avLst>
-          </a:prstGeom>
-          <a:solidFill>
-            <a:srgbClr val="2E3338"/>
-          </a:solidFill>
-          <a:ln w="25400">
-            <a:solidFill>
-              <a:srgbClr val="D45D35"/>
-            </a:solidFill>
-          </a:ln>
-          <a:effectLst/>
-        </p:spPr>
-        <p:style>
-          <a:lnRef idx="1">
-            <a:schemeClr val="accent1"/>
-          </a:lnRef>
-          <a:fillRef idx="3">
-            <a:schemeClr val="accent1"/>
-          </a:fillRef>
-          <a:effectRef idx="2">
-            <a:schemeClr val="accent1"/>
-          </a:effectRef>
-          <a:fontRef idx="minor">
-            <a:schemeClr val="lt1"/>
-          </a:fontRef>
-        </p:style>
-        <p:txBody>
-          <a:bodyPr rtlCol="0" anchor="ctr" wrap="square" lIns="73152" rIns="73152"/>
-          <a:lstStyle/>
-          <a:p>
-            <a:pPr algn="ctr"/>
-            <a:r>
-              <a:rPr sz="1300" b="1">
-                <a:solidFill>
-                  <a:srgbClr val="DEE2E6"/>
-                </a:solidFill>
-              </a:rPr>
-              <a:t>Game1 : Core</a:t>
-            </a:r>
-          </a:p>
-          <a:p>
-            <a:pPr algn="ctr"/>
-            <a:r>
-              <a:rPr sz="1100" b="0">
-                <a:solidFill>
-                  <a:srgbClr val="9AA3AB"/>
-                </a:solidFill>
-              </a:rPr>
-              <a:t>the current game state</a:t>
-            </a:r>
-          </a:p>
-        </p:txBody>
-      </p:sp>
-      <p:sp>
-        <p:nvSpPr>
-          <p:cNvPr id="5" name="Rounded Rectangle 4"/>
-          <p:cNvSpPr/>
-          <p:nvPr/>
-        </p:nvSpPr>
-        <p:spPr>
-          <a:xfrm>
-            <a:off x="374903" y="2246376"/>
-            <a:ext cx="1591056" cy="566928"/>
-          </a:xfrm>
-          <a:prstGeom prst="roundRect">
-            <a:avLst>
-              <a:gd name="adj" fmla="val 12000"/>
-            </a:avLst>
-          </a:prstGeom>
-          <a:solidFill>
-            <a:srgbClr val="2E3338"/>
-          </a:solidFill>
-          <a:ln>
-            <a:noFill/>
-          </a:ln>
-          <a:effectLst/>
-        </p:spPr>
-        <p:style>
-          <a:lnRef idx="1">
-            <a:schemeClr val="accent1"/>
-          </a:lnRef>
-          <a:fillRef idx="3">
-            <a:schemeClr val="accent1"/>
-          </a:fillRef>
-          <a:effectRef idx="2">
-            <a:schemeClr val="accent1"/>
-          </a:effectRef>
-          <a:fontRef idx="minor">
-            <a:schemeClr val="lt1"/>
-          </a:fontRef>
-        </p:style>
-        <p:txBody>
-          <a:bodyPr rtlCol="0" anchor="ctr" wrap="square" lIns="73152" rIns="73152"/>
-          <a:lstStyle/>
-          <a:p>
-            <a:pPr algn="ctr"/>
-            <a:r>
-              <a:rPr sz="1300" b="1">
-                <a:solidFill>
-                  <a:srgbClr val="DEE2E6"/>
-                </a:solidFill>
-              </a:rPr>
-              <a:t>StartState</a:t>
-            </a:r>
-          </a:p>
-        </p:txBody>
-      </p:sp>
-      <p:cxnSp>
-        <p:nvCxnSpPr>
-          <p:cNvPr id="6" name="Connector 5"/>
-          <p:cNvCxnSpPr/>
-          <p:nvPr/>
-        </p:nvCxnSpPr>
-        <p:spPr>
-          <a:xfrm flipH="1">
-            <a:off x="1170432" y="2066544"/>
-            <a:ext cx="3401568" cy="161544"/>
-          </a:xfrm>
-          <a:prstGeom prst="line">
-            <a:avLst/>
-          </a:prstGeom>
-          <a:ln w="25400">
-            <a:solidFill>
-              <a:srgbClr val="9AA3AB"/>
-            </a:solidFill>
-            <a:tailEnd type="triangle"/>
-          </a:ln>
-        </p:spPr>
-        <p:style>
-          <a:lnRef idx="2">
-            <a:schemeClr val="accent1"/>
-          </a:lnRef>
-          <a:fillRef idx="0">
-            <a:schemeClr val="accent1"/>
-          </a:fillRef>
-          <a:effectRef idx="1">
-            <a:schemeClr val="accent1"/>
-          </a:effectRef>
-          <a:fontRef idx="minor">
-            <a:schemeClr val="tx1"/>
-          </a:fontRef>
-        </p:style>
-      </p:cxnSp>
-      <p:sp>
-        <p:nvSpPr>
-          <p:cNvPr id="7" name="Rounded Rectangle 6"/>
-          <p:cNvSpPr/>
-          <p:nvPr/>
-        </p:nvSpPr>
-        <p:spPr>
-          <a:xfrm>
-            <a:off x="4279392" y="2246376"/>
-            <a:ext cx="2286000" cy="566928"/>
-          </a:xfrm>
-          <a:prstGeom prst="roundRect">
-            <a:avLst>
-              <a:gd name="adj" fmla="val 12000"/>
-            </a:avLst>
-          </a:prstGeom>
-          <a:solidFill>
-            <a:srgbClr val="2E3338"/>
-          </a:solidFill>
-          <a:ln>
-            <a:noFill/>
-          </a:ln>
-          <a:effectLst/>
-        </p:spPr>
-        <p:style>
-          <a:lnRef idx="1">
-            <a:schemeClr val="accent1"/>
-          </a:lnRef>
-          <a:fillRef idx="3">
-            <a:schemeClr val="accent1"/>
-          </a:fillRef>
-          <a:effectRef idx="2">
-            <a:schemeClr val="accent1"/>
-          </a:effectRef>
-          <a:fontRef idx="minor">
-            <a:schemeClr val="lt1"/>
-          </a:fontRef>
-        </p:style>
-        <p:txBody>
-          <a:bodyPr rtlCol="0" anchor="ctr" wrap="square" lIns="73152" rIns="73152"/>
-          <a:lstStyle/>
-          <a:p>
-            <a:pPr algn="ctr"/>
-            <a:r>
-              <a:rPr sz="1300" b="1">
-                <a:solidFill>
-                  <a:srgbClr val="DEE2E6"/>
-                </a:solidFill>
-              </a:rPr>
-              <a:t>PlayState</a:t>
-            </a:r>
-          </a:p>
-        </p:txBody>
-      </p:sp>
-      <p:sp>
-        <p:nvSpPr>
-          <p:cNvPr id="8" name="Rounded Rectangle 7"/>
-          <p:cNvSpPr/>
-          <p:nvPr/>
-        </p:nvSpPr>
-        <p:spPr>
-          <a:xfrm>
-            <a:off x="2075688" y="3011424"/>
-            <a:ext cx="1591056" cy="566928"/>
-          </a:xfrm>
-          <a:prstGeom prst="roundRect">
-            <a:avLst>
-              <a:gd name="adj" fmla="val 12000"/>
-            </a:avLst>
-          </a:prstGeom>
-          <a:solidFill>
-            <a:srgbClr val="2E3338"/>
-          </a:solidFill>
-          <a:ln>
-            <a:noFill/>
-          </a:ln>
-          <a:effectLst/>
-        </p:spPr>
-        <p:style>
-          <a:lnRef idx="1">
-            <a:schemeClr val="accent1"/>
-          </a:lnRef>
-          <a:fillRef idx="3">
-            <a:schemeClr val="accent1"/>
-          </a:fillRef>
-          <a:effectRef idx="2">
-            <a:schemeClr val="accent1"/>
-          </a:effectRef>
-          <a:fontRef idx="minor">
-            <a:schemeClr val="lt1"/>
-          </a:fontRef>
-        </p:style>
-        <p:txBody>
-          <a:bodyPr rtlCol="0" anchor="ctr" wrap="square" lIns="73152" rIns="73152"/>
-          <a:lstStyle/>
-          <a:p>
-            <a:pPr algn="ctr"/>
-            <a:r>
-              <a:rPr sz="1300" b="1">
-                <a:solidFill>
-                  <a:srgbClr val="DEE2E6"/>
-                </a:solidFill>
-              </a:rPr>
-              <a:t>Level maker</a:t>
-            </a:r>
-          </a:p>
-          <a:p>
-            <a:pPr algn="ctr"/>
-            <a:r>
-              <a:rPr sz="1100" b="0">
-                <a:solidFill>
-                  <a:srgbClr val="9AA3AB"/>
-                </a:solidFill>
-              </a:rPr>
-              <a:t>builds the level</a:t>
-            </a:r>
-          </a:p>
-        </p:txBody>
-      </p:sp>
-      <p:cxnSp>
-        <p:nvCxnSpPr>
-          <p:cNvPr id="9" name="Connector 8"/>
-          <p:cNvCxnSpPr/>
-          <p:nvPr/>
-        </p:nvCxnSpPr>
-        <p:spPr>
-          <a:xfrm flipH="1">
-            <a:off x="2871216" y="2831592"/>
-            <a:ext cx="2551176" cy="161544"/>
-          </a:xfrm>
-          <a:prstGeom prst="line">
-            <a:avLst/>
-          </a:prstGeom>
-          <a:ln w="25400">
-            <a:solidFill>
-              <a:srgbClr val="9AA3AB"/>
-            </a:solidFill>
-            <a:tailEnd type="triangle"/>
-          </a:ln>
-        </p:spPr>
-        <p:style>
-          <a:lnRef idx="2">
-            <a:schemeClr val="accent1"/>
-          </a:lnRef>
-          <a:fillRef idx="0">
-            <a:schemeClr val="accent1"/>
-          </a:fillRef>
-          <a:effectRef idx="1">
-            <a:schemeClr val="accent1"/>
-          </a:effectRef>
-          <a:fontRef idx="minor">
-            <a:schemeClr val="tx1"/>
-          </a:fontRef>
-        </p:style>
-      </p:cxnSp>
-      <p:sp>
-        <p:nvSpPr>
-          <p:cNvPr id="10" name="Rounded Rectangle 9"/>
-          <p:cNvSpPr/>
-          <p:nvPr/>
-        </p:nvSpPr>
-        <p:spPr>
-          <a:xfrm>
-            <a:off x="5129784" y="3011424"/>
-            <a:ext cx="2286000" cy="566928"/>
-          </a:xfrm>
-          <a:prstGeom prst="roundRect">
-            <a:avLst>
-              <a:gd name="adj" fmla="val 12000"/>
-            </a:avLst>
-          </a:prstGeom>
-          <a:solidFill>
-            <a:srgbClr val="2E3338"/>
-          </a:solidFill>
-          <a:ln>
-            <a:noFill/>
-          </a:ln>
-          <a:effectLst/>
-        </p:spPr>
-        <p:style>
-          <a:lnRef idx="1">
-            <a:schemeClr val="accent1"/>
-          </a:lnRef>
-          <a:fillRef idx="3">
-            <a:schemeClr val="accent1"/>
-          </a:fillRef>
-          <a:effectRef idx="2">
-            <a:schemeClr val="accent1"/>
-          </a:effectRef>
-          <a:fontRef idx="minor">
-            <a:schemeClr val="lt1"/>
-          </a:fontRef>
-        </p:style>
-        <p:txBody>
-          <a:bodyPr rtlCol="0" anchor="ctr" wrap="square" lIns="73152" rIns="73152"/>
-          <a:lstStyle/>
-          <a:p>
-            <a:pPr algn="ctr"/>
-            <a:r>
-              <a:rPr sz="1300" b="1">
-                <a:solidFill>
-                  <a:srgbClr val="DEE2E6"/>
-                </a:solidFill>
-              </a:rPr>
-              <a:t>GameLevel</a:t>
-            </a:r>
-          </a:p>
-        </p:txBody>
-      </p:sp>
-      <p:sp>
-        <p:nvSpPr>
-          <p:cNvPr id="11" name="Rounded Rectangle 10"/>
-          <p:cNvSpPr/>
-          <p:nvPr/>
-        </p:nvSpPr>
-        <p:spPr>
-          <a:xfrm>
-            <a:off x="3776472" y="3776472"/>
-            <a:ext cx="1591056" cy="566928"/>
-          </a:xfrm>
-          <a:prstGeom prst="roundRect">
-            <a:avLst>
-              <a:gd name="adj" fmla="val 12000"/>
-            </a:avLst>
-          </a:prstGeom>
-          <a:solidFill>
-            <a:srgbClr val="2E3338"/>
-          </a:solidFill>
-          <a:ln>
-            <a:noFill/>
-          </a:ln>
-          <a:effectLst/>
-        </p:spPr>
-        <p:style>
-          <a:lnRef idx="1">
-            <a:schemeClr val="accent1"/>
-          </a:lnRef>
-          <a:fillRef idx="3">
-            <a:schemeClr val="accent1"/>
-          </a:fillRef>
-          <a:effectRef idx="2">
-            <a:schemeClr val="accent1"/>
-          </a:effectRef>
-          <a:fontRef idx="minor">
-            <a:schemeClr val="lt1"/>
-          </a:fontRef>
-        </p:style>
-        <p:txBody>
-          <a:bodyPr rtlCol="0" anchor="ctr" wrap="square" lIns="73152" rIns="73152"/>
-          <a:lstStyle/>
-          <a:p>
-            <a:pPr algn="ctr"/>
-            <a:r>
-              <a:rPr sz="1300" b="1">
-                <a:solidFill>
-                  <a:srgbClr val="DEE2E6"/>
-                </a:solidFill>
-              </a:rPr>
-              <a:t>Tilemap</a:t>
-            </a:r>
-          </a:p>
-          <a:p>
-            <a:pPr algn="ctr"/>
-            <a:r>
-              <a:rPr sz="1100" b="0">
-                <a:solidFill>
-                  <a:srgbClr val="9AA3AB"/>
-                </a:solidFill>
-              </a:rPr>
-              <a:t>ground and toppers</a:t>
-            </a:r>
-          </a:p>
-        </p:txBody>
-      </p:sp>
-      <p:cxnSp>
-        <p:nvCxnSpPr>
-          <p:cNvPr id="12" name="Connector 11"/>
-          <p:cNvCxnSpPr/>
-          <p:nvPr/>
-        </p:nvCxnSpPr>
-        <p:spPr>
-          <a:xfrm flipH="1">
-            <a:off x="4572000" y="3596640"/>
-            <a:ext cx="1700784" cy="161544"/>
-          </a:xfrm>
-          <a:prstGeom prst="line">
-            <a:avLst/>
-          </a:prstGeom>
-          <a:ln w="25400">
-            <a:solidFill>
-              <a:srgbClr val="9AA3AB"/>
-            </a:solidFill>
-            <a:tailEnd type="triangle"/>
-          </a:ln>
-        </p:spPr>
-        <p:style>
-          <a:lnRef idx="2">
-            <a:schemeClr val="accent1"/>
-          </a:lnRef>
-          <a:fillRef idx="0">
-            <a:schemeClr val="accent1"/>
-          </a:fillRef>
-          <a:effectRef idx="1">
-            <a:schemeClr val="accent1"/>
-          </a:effectRef>
-          <a:fontRef idx="minor">
-            <a:schemeClr val="tx1"/>
-          </a:fontRef>
-        </p:style>
-      </p:cxnSp>
-      <p:sp>
-        <p:nvSpPr>
-          <p:cNvPr id="13" name="Rounded Rectangle 12"/>
-          <p:cNvSpPr/>
-          <p:nvPr/>
-        </p:nvSpPr>
-        <p:spPr>
-          <a:xfrm>
-            <a:off x="5477256" y="3776472"/>
-            <a:ext cx="1591056" cy="566928"/>
-          </a:xfrm>
-          <a:prstGeom prst="roundRect">
-            <a:avLst>
-              <a:gd name="adj" fmla="val 12000"/>
-            </a:avLst>
-          </a:prstGeom>
-          <a:solidFill>
-            <a:srgbClr val="2E3338"/>
-          </a:solidFill>
-          <a:ln>
-            <a:noFill/>
-          </a:ln>
-          <a:effectLst/>
-        </p:spPr>
-        <p:style>
-          <a:lnRef idx="1">
-            <a:schemeClr val="accent1"/>
-          </a:lnRef>
-          <a:fillRef idx="3">
-            <a:schemeClr val="accent1"/>
-          </a:fillRef>
-          <a:effectRef idx="2">
-            <a:schemeClr val="accent1"/>
-          </a:effectRef>
-          <a:fontRef idx="minor">
-            <a:schemeClr val="lt1"/>
-          </a:fontRef>
-        </p:style>
-        <p:txBody>
-          <a:bodyPr rtlCol="0" anchor="ctr" wrap="square" lIns="73152" rIns="73152"/>
-          <a:lstStyle/>
-          <a:p>
-            <a:pPr algn="ctr"/>
-            <a:r>
-              <a:rPr sz="1300" b="1">
-                <a:solidFill>
-                  <a:srgbClr val="DEE2E6"/>
-                </a:solidFill>
-              </a:rPr>
-              <a:t>Camera</a:t>
-            </a:r>
-          </a:p>
-        </p:txBody>
-      </p:sp>
-      <p:cxnSp>
-        <p:nvCxnSpPr>
-          <p:cNvPr id="14" name="Connector 13"/>
-          <p:cNvCxnSpPr/>
-          <p:nvPr/>
-        </p:nvCxnSpPr>
-        <p:spPr>
-          <a:xfrm>
-            <a:off x="6272784" y="3596640"/>
-            <a:ext cx="0" cy="161544"/>
-          </a:xfrm>
-          <a:prstGeom prst="line">
-            <a:avLst/>
-          </a:prstGeom>
-          <a:ln w="25400">
-            <a:solidFill>
-              <a:srgbClr val="9AA3AB"/>
-            </a:solidFill>
-            <a:tailEnd type="triangle"/>
-          </a:ln>
-        </p:spPr>
-        <p:style>
-          <a:lnRef idx="2">
-            <a:schemeClr val="accent1"/>
-          </a:lnRef>
-          <a:fillRef idx="0">
-            <a:schemeClr val="accent1"/>
-          </a:fillRef>
-          <a:effectRef idx="1">
-            <a:schemeClr val="accent1"/>
-          </a:effectRef>
-          <a:fontRef idx="minor">
-            <a:schemeClr val="tx1"/>
-          </a:fontRef>
-        </p:style>
-      </p:cxnSp>
-      <p:sp>
-        <p:nvSpPr>
-          <p:cNvPr id="15" name="Rounded Rectangle 14"/>
-          <p:cNvSpPr/>
-          <p:nvPr/>
-        </p:nvSpPr>
-        <p:spPr>
-          <a:xfrm>
-            <a:off x="7178040" y="3776472"/>
-            <a:ext cx="1591056" cy="566928"/>
-          </a:xfrm>
-          <a:prstGeom prst="roundRect">
-            <a:avLst>
-              <a:gd name="adj" fmla="val 12000"/>
-            </a:avLst>
-          </a:prstGeom>
-          <a:solidFill>
-            <a:srgbClr val="2E3338"/>
-          </a:solidFill>
-          <a:ln>
-            <a:noFill/>
-          </a:ln>
-          <a:effectLst/>
-        </p:spPr>
-        <p:style>
-          <a:lnRef idx="1">
-            <a:schemeClr val="accent1"/>
-          </a:lnRef>
-          <a:fillRef idx="3">
-            <a:schemeClr val="accent1"/>
-          </a:fillRef>
-          <a:effectRef idx="2">
-            <a:schemeClr val="accent1"/>
-          </a:effectRef>
-          <a:fontRef idx="minor">
-            <a:schemeClr val="lt1"/>
-          </a:fontRef>
-        </p:style>
-        <p:txBody>
-          <a:bodyPr rtlCol="0" anchor="ctr" wrap="square" lIns="73152" rIns="73152"/>
-          <a:lstStyle/>
-          <a:p>
-            <a:pPr algn="ctr"/>
-            <a:r>
-              <a:rPr sz="1300" b="1">
-                <a:solidFill>
-                  <a:srgbClr val="DEE2E6"/>
-                </a:solidFill>
-              </a:rPr>
-              <a:t>Entities</a:t>
-            </a:r>
-          </a:p>
-          <a:p>
-            <a:pPr algn="ctr"/>
-            <a:r>
-              <a:rPr sz="1100" b="0">
-                <a:solidFill>
-                  <a:srgbClr val="9AA3AB"/>
-                </a:solidFill>
-              </a:rPr>
-              <a:t>player, slimes, coins, boxes</a:t>
-            </a:r>
-          </a:p>
-        </p:txBody>
-      </p:sp>
-      <p:cxnSp>
-        <p:nvCxnSpPr>
-          <p:cNvPr id="16" name="Connector 15"/>
-          <p:cNvCxnSpPr/>
-          <p:nvPr/>
-        </p:nvCxnSpPr>
-        <p:spPr>
-          <a:xfrm>
-            <a:off x="6272784" y="3596640"/>
-            <a:ext cx="1700784" cy="161544"/>
-          </a:xfrm>
-          <a:prstGeom prst="line">
-            <a:avLst/>
-          </a:prstGeom>
-          <a:ln w="25400">
-            <a:solidFill>
-              <a:srgbClr val="9AA3AB"/>
-            </a:solidFill>
-            <a:tailEnd type="triangle"/>
-          </a:ln>
-        </p:spPr>
-        <p:style>
-          <a:lnRef idx="2">
-            <a:schemeClr val="accent1"/>
-          </a:lnRef>
-          <a:fillRef idx="0">
-            <a:schemeClr val="accent1"/>
-          </a:fillRef>
-          <a:effectRef idx="1">
-            <a:schemeClr val="accent1"/>
-          </a:effectRef>
-          <a:fontRef idx="minor">
-            <a:schemeClr val="tx1"/>
-          </a:fontRef>
-        </p:style>
-      </p:cxnSp>
-      <p:cxnSp>
-        <p:nvCxnSpPr>
-          <p:cNvPr id="17" name="Connector 16"/>
-          <p:cNvCxnSpPr/>
-          <p:nvPr/>
-        </p:nvCxnSpPr>
-        <p:spPr>
-          <a:xfrm>
-            <a:off x="5422392" y="2831592"/>
-            <a:ext cx="850392" cy="161544"/>
-          </a:xfrm>
-          <a:prstGeom prst="line">
-            <a:avLst/>
-          </a:prstGeom>
-          <a:ln w="25400">
-            <a:solidFill>
-              <a:srgbClr val="9AA3AB"/>
-            </a:solidFill>
-            <a:tailEnd type="triangle"/>
-          </a:ln>
-        </p:spPr>
-        <p:style>
-          <a:lnRef idx="2">
-            <a:schemeClr val="accent1"/>
-          </a:lnRef>
-          <a:fillRef idx="0">
-            <a:schemeClr val="accent1"/>
-          </a:fillRef>
-          <a:effectRef idx="1">
-            <a:schemeClr val="accent1"/>
-          </a:effectRef>
-          <a:fontRef idx="minor">
-            <a:schemeClr val="tx1"/>
-          </a:fontRef>
-        </p:style>
-      </p:cxnSp>
-      <p:cxnSp>
-        <p:nvCxnSpPr>
-          <p:cNvPr id="18" name="Connector 17"/>
-          <p:cNvCxnSpPr/>
-          <p:nvPr/>
-        </p:nvCxnSpPr>
-        <p:spPr>
-          <a:xfrm>
-            <a:off x="4572000" y="2066544"/>
-            <a:ext cx="850392" cy="161544"/>
-          </a:xfrm>
-          <a:prstGeom prst="line">
-            <a:avLst/>
-          </a:prstGeom>
-          <a:ln w="25400">
-            <a:solidFill>
-              <a:srgbClr val="9AA3AB"/>
-            </a:solidFill>
-            <a:tailEnd type="triangle"/>
-          </a:ln>
-        </p:spPr>
-        <p:style>
-          <a:lnRef idx="2">
-            <a:schemeClr val="accent1"/>
-          </a:lnRef>
-          <a:fillRef idx="0">
-            <a:schemeClr val="accent1"/>
-          </a:fillRef>
-          <a:effectRef idx="1">
-            <a:schemeClr val="accent1"/>
-          </a:effectRef>
-          <a:fontRef idx="minor">
-            <a:schemeClr val="tx1"/>
-          </a:fontRef>
-        </p:style>
-      </p:cxnSp>
-      <p:sp>
-        <p:nvSpPr>
-          <p:cNvPr id="19" name="TextBox 18"/>
+          <p:cNvPr id="4" name="TextBox 3"/>
           <p:cNvSpPr txBox="1"/>
           <p:nvPr/>
         </p:nvSpPr>
         <p:spPr>
           <a:xfrm>
-            <a:off x="457200" y="4462272"/>
-            <a:ext cx="8229600" cy="365760"/>
+            <a:off x="457200" y="2798064"/>
+            <a:ext cx="8229600" cy="457200"/>
           </a:xfrm>
           <a:prstGeom prst="rect">
             <a:avLst/>
@@ -30330,12 +30723,12 @@
           <a:p>
             <a:pPr algn="ctr"/>
             <a:r>
-              <a:rPr sz="1300" b="0" i="0">
+              <a:rPr sz="1400" b="0" i="0">
                 <a:solidFill>
                   <a:srgbClr val="9AA3AB"/>
                 </a:solidFill>
               </a:rPr>
-              <a:t>Three kinds of state in one game: the game’s, the player’s and each slime’s.</a:t>
+              <a:t>The answers, and more questions, are on the course site.</a:t>
             </a:r>
           </a:p>
         </p:txBody>
@@ -30360,17 +30753,25 @@
       <p:grpSpPr/>
       <p:sp>
         <p:nvSpPr>
-          <p:cNvPr id="2" name="Title 1"/>
-          <p:cNvSpPr>
-            <a:spLocks noGrp="1"/>
-          </p:cNvSpPr>
+          <p:cNvPr id="57" name="Google Shape;57;p12"/>
+          <p:cNvSpPr txBox="1"/>
           <p:nvPr>
             <p:ph type="title"/>
           </p:nvPr>
         </p:nvSpPr>
-        <p:spPr/>
+        <p:spPr>
+          <a:xfrm>
+            <a:off x="311700" y="195615"/>
+            <a:ext cx="8520600" cy="572700"/>
+          </a:xfrm>
+          <a:prstGeom prst="rect">
+            <a:avLst/>
+          </a:prstGeom>
+        </p:spPr>
         <p:txBody>
-          <a:bodyPr/>
+          <a:bodyPr anchorCtr="0" anchor="t" bIns="91425" lIns="91425" spcFirstLastPara="1" rIns="91425" wrap="square" tIns="91425">
+            <a:normAutofit fontScale="90000"/>
+          </a:bodyPr>
           <a:lstStyle/>
           <a:p>
             <a:pPr indent="0" lvl="0" marL="0" rtl="0" algn="l">
@@ -30384,7 +30785,7 @@
             </a:pPr>
             <a:r>
               <a:rPr lang="en"/>
-              <a:t>Summary</a:t>
+              <a:t>Apply It to Your Project</a:t>
             </a:r>
             <a:endParaRPr/>
           </a:p>
@@ -30392,22 +30793,25 @@
       </p:sp>
       <p:sp>
         <p:nvSpPr>
-          <p:cNvPr id="3" name="Text Placeholder 2"/>
-          <p:cNvSpPr>
-            <a:spLocks noGrp="1"/>
-          </p:cNvSpPr>
+          <p:cNvPr id="58" name="Google Shape;58;p12"/>
+          <p:cNvSpPr txBox="1"/>
           <p:nvPr>
-            <p:ph type="body" idx="1"/>
+            <p:ph idx="1" type="body"/>
           </p:nvPr>
         </p:nvSpPr>
         <p:spPr>
           <a:xfrm>
             <a:off x="311700" y="885950"/>
-            <a:ext cx="8520600" cy="521208"/>
+            <a:ext cx="8520600" cy="4023300"/>
           </a:xfrm>
+          <a:prstGeom prst="rect">
+            <a:avLst/>
+          </a:prstGeom>
         </p:spPr>
         <p:txBody>
-          <a:bodyPr/>
+          <a:bodyPr anchorCtr="0" anchor="t" bIns="91425" lIns="91425" spcFirstLastPara="1" rIns="91425" wrap="square" tIns="91425">
+            <a:normAutofit/>
+          </a:bodyPr>
           <a:lstStyle/>
           <a:p>
             <a:pPr indent="-330200" lvl="0" marL="457200" rtl="0" algn="l">
@@ -30421,465 +30825,61 @@
               <a:buChar char="●"/>
             </a:pPr>
             <a:r>
-              <a:rPr lang="en" b="1"/>
-              <a:t>Seven concerns, and this session’s answer to each.</a:t>
+              <a:rPr lang="en"/>
+              <a:t>What would you want to see while debugging your game?</a:t>
             </a:r>
             <a:endParaRPr/>
           </a:p>
-        </p:txBody>
-      </p:sp>
-      <p:sp>
-        <p:nvSpPr>
-          <p:cNvPr id="4" name="Rounded Rectangle 3"/>
-          <p:cNvSpPr/>
-          <p:nvPr/>
-        </p:nvSpPr>
-        <p:spPr>
-          <a:xfrm>
-            <a:off x="548640" y="1417320"/>
-            <a:ext cx="2560320" cy="841248"/>
-          </a:xfrm>
-          <a:prstGeom prst="roundRect">
-            <a:avLst>
-              <a:gd name="adj" fmla="val 12000"/>
-            </a:avLst>
-          </a:prstGeom>
-          <a:solidFill>
-            <a:srgbClr val="2E3338"/>
-          </a:solidFill>
-          <a:ln>
-            <a:noFill/>
-          </a:ln>
-          <a:effectLst/>
-        </p:spPr>
-        <p:style>
-          <a:lnRef idx="1">
-            <a:schemeClr val="accent1"/>
-          </a:lnRef>
-          <a:fillRef idx="3">
-            <a:schemeClr val="accent1"/>
-          </a:fillRef>
-          <a:effectRef idx="2">
-            <a:schemeClr val="accent1"/>
-          </a:effectRef>
-          <a:fontRef idx="minor">
-            <a:schemeClr val="lt1"/>
-          </a:fontRef>
-        </p:style>
-        <p:txBody>
-          <a:bodyPr rtlCol="0" anchor="ctr" wrap="square" lIns="73152" rIns="73152"/>
-          <a:lstStyle/>
-          <a:p>
-            <a:pPr algn="ctr"/>
-            <a:r>
-              <a:rPr sz="1500" b="1">
-                <a:solidFill>
-                  <a:srgbClr val="DEE2E6"/>
-                </a:solidFill>
-              </a:rPr>
-              <a:t>What the level is made of</a:t>
-            </a:r>
-          </a:p>
-          <a:p>
-            <a:pPr algn="ctr"/>
-            <a:r>
-              <a:rPr sz="1300" b="0">
-                <a:solidFill>
-                  <a:srgbClr val="9AA3AB"/>
-                </a:solidFill>
-              </a:rPr>
-              <a:t>Tilemaps, built by level makers</a:t>
-            </a:r>
-          </a:p>
-        </p:txBody>
-      </p:sp>
-      <p:sp>
-        <p:nvSpPr>
-          <p:cNvPr id="5" name="Rounded Rectangle 4"/>
-          <p:cNvSpPr/>
-          <p:nvPr/>
-        </p:nvSpPr>
-        <p:spPr>
-          <a:xfrm>
-            <a:off x="3291840" y="1417320"/>
-            <a:ext cx="2560320" cy="841248"/>
-          </a:xfrm>
-          <a:prstGeom prst="roundRect">
-            <a:avLst>
-              <a:gd name="adj" fmla="val 12000"/>
-            </a:avLst>
-          </a:prstGeom>
-          <a:solidFill>
-            <a:srgbClr val="2E3338"/>
-          </a:solidFill>
-          <a:ln>
-            <a:noFill/>
-          </a:ln>
-          <a:effectLst/>
-        </p:spPr>
-        <p:style>
-          <a:lnRef idx="1">
-            <a:schemeClr val="accent1"/>
-          </a:lnRef>
-          <a:fillRef idx="3">
-            <a:schemeClr val="accent1"/>
-          </a:fillRef>
-          <a:effectRef idx="2">
-            <a:schemeClr val="accent1"/>
-          </a:effectRef>
-          <a:fontRef idx="minor">
-            <a:schemeClr val="lt1"/>
-          </a:fontRef>
-        </p:style>
-        <p:txBody>
-          <a:bodyPr rtlCol="0" anchor="ctr" wrap="square" lIns="73152" rIns="73152"/>
-          <a:lstStyle/>
-          <a:p>
-            <a:pPr algn="ctr"/>
-            <a:r>
-              <a:rPr sz="1500" b="1">
-                <a:solidFill>
-                  <a:srgbClr val="DEE2E6"/>
-                </a:solidFill>
-              </a:rPr>
-              <a:t>Things that move</a:t>
-            </a:r>
-          </a:p>
-          <a:p>
-            <a:pPr algn="ctr"/>
-            <a:r>
-              <a:rPr sz="1300" b="0">
-                <a:solidFill>
-                  <a:srgbClr val="9AA3AB"/>
-                </a:solidFill>
-              </a:rPr>
-              <a:t>Entities, in a list</a:t>
-            </a:r>
-          </a:p>
-        </p:txBody>
-      </p:sp>
-      <p:sp>
-        <p:nvSpPr>
-          <p:cNvPr id="6" name="Rounded Rectangle 5"/>
-          <p:cNvSpPr/>
-          <p:nvPr/>
-        </p:nvSpPr>
-        <p:spPr>
-          <a:xfrm>
-            <a:off x="6035040" y="1417320"/>
-            <a:ext cx="2560320" cy="841248"/>
-          </a:xfrm>
-          <a:prstGeom prst="roundRect">
-            <a:avLst>
-              <a:gd name="adj" fmla="val 12000"/>
-            </a:avLst>
-          </a:prstGeom>
-          <a:solidFill>
-            <a:srgbClr val="2E3338"/>
-          </a:solidFill>
-          <a:ln>
-            <a:noFill/>
-          </a:ln>
-          <a:effectLst/>
-        </p:spPr>
-        <p:style>
-          <a:lnRef idx="1">
-            <a:schemeClr val="accent1"/>
-          </a:lnRef>
-          <a:fillRef idx="3">
-            <a:schemeClr val="accent1"/>
-          </a:fillRef>
-          <a:effectRef idx="2">
-            <a:schemeClr val="accent1"/>
-          </a:effectRef>
-          <a:fontRef idx="minor">
-            <a:schemeClr val="lt1"/>
-          </a:fontRef>
-        </p:style>
-        <p:txBody>
-          <a:bodyPr rtlCol="0" anchor="ctr" wrap="square" lIns="73152" rIns="73152"/>
-          <a:lstStyle/>
-          <a:p>
-            <a:pPr algn="ctr"/>
-            <a:r>
-              <a:rPr sz="1500" b="1">
-                <a:solidFill>
-                  <a:srgbClr val="DEE2E6"/>
-                </a:solidFill>
-              </a:rPr>
-              <a:t>Whether a spot is solid</a:t>
-            </a:r>
-          </a:p>
-          <a:p>
-            <a:pPr algn="ctr"/>
-            <a:r>
-              <a:rPr sz="1300" b="0">
-                <a:solidFill>
-                  <a:srgbClr val="9AA3AB"/>
-                </a:solidFill>
-              </a:rPr>
-              <a:t>One lookup in the grid, O(1)</a:t>
-            </a:r>
-          </a:p>
-        </p:txBody>
-      </p:sp>
-      <p:sp>
-        <p:nvSpPr>
-          <p:cNvPr id="7" name="Rounded Rectangle 6"/>
-          <p:cNvSpPr/>
-          <p:nvPr/>
-        </p:nvSpPr>
-        <p:spPr>
-          <a:xfrm>
-            <a:off x="548640" y="2395728"/>
-            <a:ext cx="2560320" cy="841248"/>
-          </a:xfrm>
-          <a:prstGeom prst="roundRect">
-            <a:avLst>
-              <a:gd name="adj" fmla="val 12000"/>
-            </a:avLst>
-          </a:prstGeom>
-          <a:solidFill>
-            <a:srgbClr val="2E3338"/>
-          </a:solidFill>
-          <a:ln>
-            <a:noFill/>
-          </a:ln>
-          <a:effectLst/>
-        </p:spPr>
-        <p:style>
-          <a:lnRef idx="1">
-            <a:schemeClr val="accent1"/>
-          </a:lnRef>
-          <a:fillRef idx="3">
-            <a:schemeClr val="accent1"/>
-          </a:fillRef>
-          <a:effectRef idx="2">
-            <a:schemeClr val="accent1"/>
-          </a:effectRef>
-          <a:fontRef idx="minor">
-            <a:schemeClr val="lt1"/>
-          </a:fontRef>
-        </p:style>
-        <p:txBody>
-          <a:bodyPr rtlCol="0" anchor="ctr" wrap="square" lIns="73152" rIns="73152"/>
-          <a:lstStyle/>
-          <a:p>
-            <a:pPr algn="ctr"/>
-            <a:r>
-              <a:rPr sz="1500" b="1">
-                <a:solidFill>
-                  <a:srgbClr val="DEE2E6"/>
-                </a:solidFill>
-              </a:rPr>
-              <a:t>Stopping at a wall</a:t>
-            </a:r>
-          </a:p>
-          <a:p>
-            <a:pPr algn="ctr"/>
-            <a:r>
-              <a:rPr sz="1300" b="0">
-                <a:solidFill>
-                  <a:srgbClr val="9AA3AB"/>
-                </a:solidFill>
-              </a:rPr>
-              <a:t>Move, then snap, an axis at a time</a:t>
-            </a:r>
-          </a:p>
-        </p:txBody>
-      </p:sp>
-      <p:sp>
-        <p:nvSpPr>
-          <p:cNvPr id="8" name="Rounded Rectangle 7"/>
-          <p:cNvSpPr/>
-          <p:nvPr/>
-        </p:nvSpPr>
-        <p:spPr>
-          <a:xfrm>
-            <a:off x="3291840" y="2395728"/>
-            <a:ext cx="2560320" cy="841248"/>
-          </a:xfrm>
-          <a:prstGeom prst="roundRect">
-            <a:avLst>
-              <a:gd name="adj" fmla="val 12000"/>
-            </a:avLst>
-          </a:prstGeom>
-          <a:solidFill>
-            <a:srgbClr val="2E3338"/>
-          </a:solidFill>
-          <a:ln>
-            <a:noFill/>
-          </a:ln>
-          <a:effectLst/>
-        </p:spPr>
-        <p:style>
-          <a:lnRef idx="1">
-            <a:schemeClr val="accent1"/>
-          </a:lnRef>
-          <a:fillRef idx="3">
-            <a:schemeClr val="accent1"/>
-          </a:fillRef>
-          <a:effectRef idx="2">
-            <a:schemeClr val="accent1"/>
-          </a:effectRef>
-          <a:fontRef idx="minor">
-            <a:schemeClr val="lt1"/>
-          </a:fontRef>
-        </p:style>
-        <p:txBody>
-          <a:bodyPr rtlCol="0" anchor="ctr" wrap="square" lIns="73152" rIns="73152"/>
-          <a:lstStyle/>
-          <a:p>
-            <a:pPr algn="ctr"/>
-            <a:r>
-              <a:rPr sz="1500" b="1">
-                <a:solidFill>
-                  <a:srgbClr val="DEE2E6"/>
-                </a:solidFill>
-              </a:rPr>
-              <a:t>What the player is doing</a:t>
-            </a:r>
-          </a:p>
-          <a:p>
-            <a:pPr algn="ctr"/>
-            <a:r>
-              <a:rPr sz="1300" b="0">
-                <a:solidFill>
-                  <a:srgbClr val="9AA3AB"/>
-                </a:solidFill>
-              </a:rPr>
-              <a:t>States sharing a base state</a:t>
-            </a:r>
-          </a:p>
-        </p:txBody>
-      </p:sp>
-      <p:sp>
-        <p:nvSpPr>
-          <p:cNvPr id="9" name="Rounded Rectangle 8"/>
-          <p:cNvSpPr/>
-          <p:nvPr/>
-        </p:nvSpPr>
-        <p:spPr>
-          <a:xfrm>
-            <a:off x="6035040" y="2395728"/>
-            <a:ext cx="2560320" cy="841248"/>
-          </a:xfrm>
-          <a:prstGeom prst="roundRect">
-            <a:avLst>
-              <a:gd name="adj" fmla="val 12000"/>
-            </a:avLst>
-          </a:prstGeom>
-          <a:solidFill>
-            <a:srgbClr val="2E3338"/>
-          </a:solidFill>
-          <a:ln>
-            <a:noFill/>
-          </a:ln>
-          <a:effectLst/>
-        </p:spPr>
-        <p:style>
-          <a:lnRef idx="1">
-            <a:schemeClr val="accent1"/>
-          </a:lnRef>
-          <a:fillRef idx="3">
-            <a:schemeClr val="accent1"/>
-          </a:fillRef>
-          <a:effectRef idx="2">
-            <a:schemeClr val="accent1"/>
-          </a:effectRef>
-          <a:fontRef idx="minor">
-            <a:schemeClr val="lt1"/>
-          </a:fontRef>
-        </p:style>
-        <p:txBody>
-          <a:bodyPr rtlCol="0" anchor="ctr" wrap="square" lIns="73152" rIns="73152"/>
-          <a:lstStyle/>
-          <a:p>
-            <a:pPr algn="ctr"/>
-            <a:r>
-              <a:rPr sz="1500" b="1">
-                <a:solidFill>
-                  <a:srgbClr val="DEE2E6"/>
-                </a:solidFill>
-              </a:rPr>
-              <a:t>A level wider than the screen</a:t>
-            </a:r>
-          </a:p>
-          <a:p>
-            <a:pPr algn="ctr"/>
-            <a:r>
-              <a:rPr sz="1300" b="0">
-                <a:solidFill>
-                  <a:srgbClr val="9AA3AB"/>
-                </a:solidFill>
-              </a:rPr>
-              <a:t>A camera transform</a:t>
-            </a:r>
-          </a:p>
-        </p:txBody>
-      </p:sp>
-      <p:sp>
-        <p:nvSpPr>
-          <p:cNvPr id="10" name="Rounded Rectangle 9"/>
-          <p:cNvSpPr/>
-          <p:nvPr/>
-        </p:nvSpPr>
-        <p:spPr>
-          <a:xfrm>
-            <a:off x="3291840" y="3374136"/>
-            <a:ext cx="2560320" cy="841248"/>
-          </a:xfrm>
-          <a:prstGeom prst="roundRect">
-            <a:avLst>
-              <a:gd name="adj" fmla="val 12000"/>
-            </a:avLst>
-          </a:prstGeom>
-          <a:solidFill>
-            <a:srgbClr val="2E3338"/>
-          </a:solidFill>
-          <a:ln>
-            <a:noFill/>
-          </a:ln>
-          <a:effectLst/>
-        </p:spPr>
-        <p:style>
-          <a:lnRef idx="1">
-            <a:schemeClr val="accent1"/>
-          </a:lnRef>
-          <a:fillRef idx="3">
-            <a:schemeClr val="accent1"/>
-          </a:fillRef>
-          <a:effectRef idx="2">
-            <a:schemeClr val="accent1"/>
-          </a:effectRef>
-          <a:fontRef idx="minor">
-            <a:schemeClr val="lt1"/>
-          </a:fontRef>
-        </p:style>
-        <p:txBody>
-          <a:bodyPr rtlCol="0" anchor="ctr" wrap="square" lIns="73152" rIns="73152"/>
-          <a:lstStyle/>
-          <a:p>
-            <a:pPr algn="ctr"/>
-            <a:r>
-              <a:rPr sz="1500" b="1">
-                <a:solidFill>
-                  <a:srgbClr val="DEE2E6"/>
-                </a:solidFill>
-              </a:rPr>
-              <a:t>Seeing the collision code</a:t>
-            </a:r>
-          </a:p>
-          <a:p>
-            <a:pPr algn="ctr"/>
-            <a:r>
-              <a:rPr sz="1300" b="0">
-                <a:solidFill>
-                  <a:srgbClr val="9AA3AB"/>
-                </a:solidFill>
-              </a:rPr>
-              <a:t>Debug drawing</a:t>
-            </a:r>
+          <a:p>
+            <a:pPr indent="-317500" lvl="1" marL="914400" rtl="0" algn="l">
+              <a:spcBef>
+                <a:spcPts val="0"/>
+              </a:spcBef>
+              <a:spcAft>
+                <a:spcPts val="0"/>
+              </a:spcAft>
+              <a:buSzPts val="1400"/>
+              <a:buChar char="○"/>
+            </a:pPr>
+            <a:r>
+              <a:rPr lang="en"/>
+              <a:t>Add debug drawing for hitboxes, triggers or AI targets, behind a key</a:t>
+            </a:r>
+            <a:endParaRPr/>
+          </a:p>
+          <a:p>
+            <a:pPr indent="-330200" lvl="0" marL="457200" rtl="0" algn="l">
+              <a:spcBef>
+                <a:spcPts val="0"/>
+              </a:spcBef>
+              <a:spcAft>
+                <a:spcPts val="0"/>
+              </a:spcAft>
+              <a:buSzPts val="1600"/>
+              <a:buChar char="●"/>
+            </a:pPr>
+            <a:r>
+              <a:rPr lang="en"/>
+              <a:t>Which entities have distinct behaviour modes? Draw a state diagram for one</a:t>
+            </a:r>
+            <a:endParaRPr/>
+          </a:p>
+          <a:p>
+            <a:pPr indent="-330200" lvl="0" marL="457200" rtl="0" algn="l">
+              <a:spcBef>
+                <a:spcPts val="0"/>
+              </a:spcBef>
+              <a:spcAft>
+                <a:spcPts val="0"/>
+              </a:spcAft>
+              <a:buSzPts val="1600"/>
+              <a:buChar char="●"/>
+            </a:pPr>
+            <a:r>
+              <a:rPr lang="en"/>
+              <a:t>Is anything a set of booleans that should be a state machine?</a:t>
+            </a:r>
+            <a:endParaRPr/>
           </a:p>
         </p:txBody>
       </p:sp>
